--- a/Deliverables/2_Presentationand_Video/VLA-1 Rat Kho Final Presentation.pptx
+++ b/Deliverables/2_Presentationand_Video/VLA-1 Rat Kho Final Presentation.pptx
@@ -3096,7 +3096,7 @@
     <p:bg>
       <p:bgPr>
         <a:solidFill>
-          <a:srgbClr val="F8FAFC"/>
+          <a:srgbClr val="FFFFFF"/>
         </a:solidFill>
         <a:effectLst/>
       </p:bgPr>
@@ -3123,10 +3123,12 @@
             <a:avLst/>
           </a:prstGeom>
           <a:solidFill>
-            <a:srgbClr val="DBEAFE"/>
+            <a:srgbClr val="EEF3FF"/>
           </a:solidFill>
-          <a:ln>
-            <a:noFill/>
+          <a:ln w="10160">
+            <a:solidFill>
+              <a:srgbClr val="5999FF"/>
+            </a:solidFill>
           </a:ln>
         </p:spPr>
         <p:style>
@@ -3181,9 +3183,9 @@
             <a:r>
               <a:rPr sz="950" b="1">
                 <a:solidFill>
-                  <a:srgbClr val="1E3A8A"/>
-                </a:solidFill>
-                <a:latin typeface="Arial"/>
+                  <a:srgbClr val="0C35F2"/>
+                </a:solidFill>
+                <a:latin typeface="Aptos Display"/>
               </a:rPr>
               <a:t>Masters Project Presentation</a:t>
             </a:r>
@@ -3199,7 +3201,7 @@
         <p:spPr>
           <a:xfrm>
             <a:off x="609600" y="1371600"/>
-            <a:ext cx="5334000" cy="863600"/>
+            <a:ext cx="5334000" cy="914400"/>
           </a:xfrm>
           <a:prstGeom prst="rect">
             <a:avLst/>
@@ -3214,15 +3216,15 @@
           <a:p>
             <a:pPr algn="l">
               <a:lnSpc>
-                <a:spcPts val="3450"/>
-              </a:lnSpc>
-            </a:pPr>
-            <a:r>
-              <a:rPr sz="3000" b="1">
-                <a:solidFill>
-                  <a:srgbClr val="0F172A"/>
-                </a:solidFill>
-                <a:latin typeface="Arial"/>
+                <a:spcPts val="3909"/>
+              </a:lnSpc>
+            </a:pPr>
+            <a:r>
+              <a:rPr sz="3400" b="1">
+                <a:solidFill>
+                  <a:srgbClr val="05164D"/>
+                </a:solidFill>
+                <a:latin typeface="Aptos Display"/>
               </a:rPr>
               <a:t>AGV Fleet VLA Intelligence</a:t>
             </a:r>
@@ -3237,7 +3239,7 @@
         </p:nvSpPr>
         <p:spPr>
           <a:xfrm>
-            <a:off x="609600" y="2286000"/>
+            <a:off x="609600" y="2362200"/>
             <a:ext cx="5461000" cy="1016000"/>
           </a:xfrm>
           <a:prstGeom prst="rect">
@@ -3259,9 +3261,9 @@
             <a:r>
               <a:rPr sz="1500" b="0">
                 <a:solidFill>
-                  <a:srgbClr val="475569"/>
-                </a:solidFill>
-                <a:latin typeface="Arial"/>
+                  <a:srgbClr val="595452"/>
+                </a:solidFill>
+                <a:latin typeface="Aptos"/>
               </a:rPr>
               <a:t>Multimodal Vision-Language-Action Decision Support for False-Positive Safety Stops in Autonomous Guided Vehicles</a:t>
             </a:r>
@@ -3298,9 +3300,9 @@
             <a:r>
               <a:rPr sz="1300" b="0">
                 <a:solidFill>
-                  <a:srgbClr val="0F172A"/>
-                </a:solidFill>
-                <a:latin typeface="Arial"/>
+                  <a:srgbClr val="05164D"/>
+                </a:solidFill>
+                <a:latin typeface="Aptos"/>
               </a:rPr>
               <a:t>Vikas Rathore, Neha Anil Khot</a:t>
             </a:r>
@@ -3314,9 +3316,9 @@
             <a:r>
               <a:rPr sz="1300" b="0">
                 <a:solidFill>
-                  <a:srgbClr val="0F172A"/>
-                </a:solidFill>
-                <a:latin typeface="Arial"/>
+                  <a:srgbClr val="05164D"/>
+                </a:solidFill>
+                <a:latin typeface="Aptos"/>
               </a:rPr>
               <a:t>Information Technology</a:t>
             </a:r>
@@ -3330,9 +3332,9 @@
             <a:r>
               <a:rPr sz="1300" b="0">
                 <a:solidFill>
-                  <a:srgbClr val="0F172A"/>
-                </a:solidFill>
-                <a:latin typeface="Arial"/>
+                  <a:srgbClr val="05164D"/>
+                </a:solidFill>
+                <a:latin typeface="Aptos"/>
               </a:rPr>
               <a:t>Frankfurt University of Applied Sciences</a:t>
             </a:r>
@@ -3346,9 +3348,9 @@
             <a:r>
               <a:rPr sz="1300" b="0">
                 <a:solidFill>
-                  <a:srgbClr val="0F172A"/>
-                </a:solidFill>
-                <a:latin typeface="Arial"/>
+                  <a:srgbClr val="05164D"/>
+                </a:solidFill>
+                <a:latin typeface="Aptos"/>
               </a:rPr>
               <a:t>Autonomous Intelligent Systems</a:t>
             </a:r>
@@ -3362,9 +3364,9 @@
             <a:r>
               <a:rPr sz="1300" b="0">
                 <a:solidFill>
-                  <a:srgbClr val="0F172A"/>
-                </a:solidFill>
-                <a:latin typeface="Arial"/>
+                  <a:srgbClr val="05164D"/>
+                </a:solidFill>
+                <a:latin typeface="Aptos"/>
               </a:rPr>
               <a:t>Project guidance: Prof. Peter Nauth</a:t>
             </a:r>
@@ -3390,7 +3392,7 @@
           </a:solidFill>
           <a:ln w="12700">
             <a:solidFill>
-              <a:srgbClr val="CBD5E1"/>
+              <a:srgbClr val="D9D9D2"/>
             </a:solidFill>
           </a:ln>
         </p:spPr>
@@ -3455,11 +3457,11 @@
             <a:avLst/>
           </a:prstGeom>
           <a:solidFill>
-            <a:srgbClr val="EFF6FF"/>
+            <a:srgbClr val="EEF3FF"/>
           </a:solidFill>
           <a:ln w="12700">
             <a:solidFill>
-              <a:srgbClr val="CBD5E1"/>
+              <a:srgbClr val="D9D9D2"/>
             </a:solidFill>
           </a:ln>
         </p:spPr>
@@ -3515,9 +3517,9 @@
             <a:r>
               <a:rPr sz="1250" b="1">
                 <a:solidFill>
-                  <a:srgbClr val="1E3A8A"/>
-                </a:solidFill>
-                <a:latin typeface="Arial"/>
+                  <a:srgbClr val="05164D"/>
+                </a:solidFill>
+                <a:latin typeface="Aptos Display"/>
               </a:rPr>
               <a:t>Human-in-the-loop advisory system for operator review of AGV stop events. Prototype evidence, not autonomous actuation.</a:t>
             </a:r>
@@ -3554,9 +3556,9 @@
             <a:r>
               <a:rPr sz="850" b="0">
                 <a:solidFill>
-                  <a:srgbClr val="475569"/>
-                </a:solidFill>
-                <a:latin typeface="Arial"/>
+                  <a:srgbClr val="948E8D"/>
+                </a:solidFill>
+                <a:latin typeface="Aptos"/>
               </a:rPr>
               <a:t>AGV Fleet VLA Intelligence</a:t>
             </a:r>
@@ -3593,9 +3595,9 @@
             <a:r>
               <a:rPr sz="850" b="0">
                 <a:solidFill>
-                  <a:srgbClr val="475569"/>
-                </a:solidFill>
-                <a:latin typeface="Arial"/>
+                  <a:srgbClr val="948E8D"/>
+                </a:solidFill>
+                <a:latin typeface="Aptos"/>
               </a:rPr>
               <a:t>1/13</a:t>
             </a:r>
@@ -3616,7 +3618,7 @@
     <p:bg>
       <p:bgPr>
         <a:solidFill>
-          <a:srgbClr val="F8FAFC"/>
+          <a:srgbClr val="FFFFFF"/>
         </a:solidFill>
         <a:effectLst/>
       </p:bgPr>
@@ -3658,9 +3660,9 @@
             <a:r>
               <a:rPr sz="2400" b="1">
                 <a:solidFill>
-                  <a:srgbClr val="0F172A"/>
-                </a:solidFill>
-                <a:latin typeface="Arial"/>
+                  <a:srgbClr val="05164D"/>
+                </a:solidFill>
+                <a:latin typeface="Aptos Display"/>
               </a:rPr>
               <a:t>Repeated-Case Findings</a:t>
             </a:r>
@@ -3675,17 +3677,19 @@
         </p:nvSpPr>
         <p:spPr>
           <a:xfrm>
-            <a:off x="10287000" y="279400"/>
-            <a:ext cx="1371600" cy="304800"/>
+            <a:off x="10134600" y="279400"/>
+            <a:ext cx="1524000" cy="304800"/>
           </a:xfrm>
           <a:prstGeom prst="roundRect">
             <a:avLst/>
           </a:prstGeom>
           <a:solidFill>
-            <a:srgbClr val="DBEAFE"/>
+            <a:srgbClr val="EEF3FF"/>
           </a:solidFill>
-          <a:ln>
-            <a:noFill/>
+          <a:ln w="10160">
+            <a:solidFill>
+              <a:srgbClr val="5999FF"/>
+            </a:solidFill>
           </a:ln>
         </p:spPr>
         <p:style>
@@ -3718,8 +3722,8 @@
         </p:nvSpPr>
         <p:spPr>
           <a:xfrm>
-            <a:off x="10287000" y="330200"/>
-            <a:ext cx="1371600" cy="228600"/>
+            <a:off x="10134600" y="330200"/>
+            <a:ext cx="1524000" cy="228600"/>
           </a:xfrm>
           <a:prstGeom prst="rect">
             <a:avLst/>
@@ -3740,9 +3744,9 @@
             <a:r>
               <a:rPr sz="950" b="1">
                 <a:solidFill>
-                  <a:srgbClr val="1E3A8A"/>
-                </a:solidFill>
-                <a:latin typeface="Arial"/>
+                  <a:srgbClr val="0C35F2"/>
+                </a:solidFill>
+                <a:latin typeface="Aptos Display"/>
               </a:rPr>
               <a:t>FINDINGS</a:t>
             </a:r>
@@ -3764,7 +3768,7 @@
             <a:avLst/>
           </a:prstGeom>
           <a:solidFill>
-            <a:srgbClr val="CBD5E1"/>
+            <a:srgbClr val="D9D9D2"/>
           </a:solidFill>
           <a:ln>
             <a:noFill/>
@@ -3822,9 +3826,9 @@
             <a:r>
               <a:rPr sz="850" b="0">
                 <a:solidFill>
-                  <a:srgbClr val="475569"/>
-                </a:solidFill>
-                <a:latin typeface="Arial"/>
+                  <a:srgbClr val="948E8D"/>
+                </a:solidFill>
+                <a:latin typeface="Aptos"/>
               </a:rPr>
               <a:t>AGV Fleet VLA Intelligence</a:t>
             </a:r>
@@ -3861,9 +3865,9 @@
             <a:r>
               <a:rPr sz="850" b="0">
                 <a:solidFill>
-                  <a:srgbClr val="475569"/>
-                </a:solidFill>
-                <a:latin typeface="Arial"/>
+                  <a:srgbClr val="948E8D"/>
+                </a:solidFill>
+                <a:latin typeface="Aptos"/>
               </a:rPr>
               <a:t>10/13</a:t>
             </a:r>
@@ -3885,11 +3889,11 @@
             <a:avLst/>
           </a:prstGeom>
           <a:solidFill>
-            <a:srgbClr val="EFF6FF"/>
+            <a:srgbClr val="EEF3FF"/>
           </a:solidFill>
           <a:ln w="12700">
             <a:solidFill>
-              <a:srgbClr val="CBD5E1"/>
+              <a:srgbClr val="D9D9D2"/>
             </a:solidFill>
           </a:ln>
         </p:spPr>
@@ -3945,9 +3949,9 @@
             <a:r>
               <a:rPr sz="1050" b="1">
                 <a:solidFill>
-                  <a:srgbClr val="0F172A"/>
-                </a:solidFill>
-                <a:latin typeface="Arial"/>
+                  <a:srgbClr val="05164D"/>
+                </a:solidFill>
+                <a:latin typeface="Aptos Display"/>
               </a:rPr>
               <a:t>Alias</a:t>
             </a:r>
@@ -3969,11 +3973,11 @@
             <a:avLst/>
           </a:prstGeom>
           <a:solidFill>
-            <a:srgbClr val="EFF6FF"/>
+            <a:srgbClr val="EEF3FF"/>
           </a:solidFill>
           <a:ln w="12700">
             <a:solidFill>
-              <a:srgbClr val="CBD5E1"/>
+              <a:srgbClr val="D9D9D2"/>
             </a:solidFill>
           </a:ln>
         </p:spPr>
@@ -4029,9 +4033,9 @@
             <a:r>
               <a:rPr sz="1050" b="1">
                 <a:solidFill>
-                  <a:srgbClr val="0F172A"/>
-                </a:solidFill>
-                <a:latin typeface="Arial"/>
+                  <a:srgbClr val="05164D"/>
+                </a:solidFill>
+                <a:latin typeface="Aptos Display"/>
               </a:rPr>
               <a:t>Score</a:t>
             </a:r>
@@ -4053,11 +4057,11 @@
             <a:avLst/>
           </a:prstGeom>
           <a:solidFill>
-            <a:srgbClr val="EFF6FF"/>
+            <a:srgbClr val="EEF3FF"/>
           </a:solidFill>
           <a:ln w="12700">
             <a:solidFill>
-              <a:srgbClr val="CBD5E1"/>
+              <a:srgbClr val="D9D9D2"/>
             </a:solidFill>
           </a:ln>
         </p:spPr>
@@ -4113,9 +4117,9 @@
             <a:r>
               <a:rPr sz="1050" b="1">
                 <a:solidFill>
-                  <a:srgbClr val="0F172A"/>
-                </a:solidFill>
-                <a:latin typeface="Arial"/>
+                  <a:srgbClr val="05164D"/>
+                </a:solidFill>
+                <a:latin typeface="Aptos Display"/>
               </a:rPr>
               <a:t>Operator</a:t>
             </a:r>
@@ -4137,11 +4141,11 @@
             <a:avLst/>
           </a:prstGeom>
           <a:solidFill>
-            <a:srgbClr val="EFF6FF"/>
+            <a:srgbClr val="EEF3FF"/>
           </a:solidFill>
           <a:ln w="12700">
             <a:solidFill>
-              <a:srgbClr val="CBD5E1"/>
+              <a:srgbClr val="D9D9D2"/>
             </a:solidFill>
           </a:ln>
         </p:spPr>
@@ -4197,9 +4201,9 @@
             <a:r>
               <a:rPr sz="1050" b="1">
                 <a:solidFill>
-                  <a:srgbClr val="0F172A"/>
-                </a:solidFill>
-                <a:latin typeface="Arial"/>
+                  <a:srgbClr val="05164D"/>
+                </a:solidFill>
+                <a:latin typeface="Aptos Display"/>
               </a:rPr>
               <a:t>Interpretation</a:t>
             </a:r>
@@ -4225,7 +4229,7 @@
           </a:solidFill>
           <a:ln w="12700">
             <a:solidFill>
-              <a:srgbClr val="CBD5E1"/>
+              <a:srgbClr val="D9D9D2"/>
             </a:solidFill>
           </a:ln>
         </p:spPr>
@@ -4281,9 +4285,9 @@
             <a:r>
               <a:rPr sz="980" b="0">
                 <a:solidFill>
-                  <a:srgbClr val="0F172A"/>
-                </a:solidFill>
-                <a:latin typeface="Arial"/>
+                  <a:srgbClr val="05164D"/>
+                </a:solidFill>
+                <a:latin typeface="Aptos"/>
               </a:rPr>
               <a:t>PED-A</a:t>
             </a:r>
@@ -4309,7 +4313,7 @@
           </a:solidFill>
           <a:ln w="12700">
             <a:solidFill>
-              <a:srgbClr val="CBD5E1"/>
+              <a:srgbClr val="D9D9D2"/>
             </a:solidFill>
           </a:ln>
         </p:spPr>
@@ -4365,9 +4369,9 @@
             <a:r>
               <a:rPr sz="980" b="0">
                 <a:solidFill>
-                  <a:srgbClr val="0F172A"/>
-                </a:solidFill>
-                <a:latin typeface="Arial"/>
+                  <a:srgbClr val="05164D"/>
+                </a:solidFill>
+                <a:latin typeface="Aptos"/>
               </a:rPr>
               <a:t>3/5</a:t>
             </a:r>
@@ -4393,7 +4397,7 @@
           </a:solidFill>
           <a:ln w="12700">
             <a:solidFill>
-              <a:srgbClr val="CBD5E1"/>
+              <a:srgbClr val="D9D9D2"/>
             </a:solidFill>
           </a:ln>
         </p:spPr>
@@ -4449,9 +4453,9 @@
             <a:r>
               <a:rPr sz="980" b="0">
                 <a:solidFill>
-                  <a:srgbClr val="0F172A"/>
-                </a:solidFill>
-                <a:latin typeface="Arial"/>
+                  <a:srgbClr val="05164D"/>
+                </a:solidFill>
+                <a:latin typeface="Aptos"/>
               </a:rPr>
               <a:t>Force Override</a:t>
             </a:r>
@@ -4477,7 +4481,7 @@
           </a:solidFill>
           <a:ln w="12700">
             <a:solidFill>
-              <a:srgbClr val="CBD5E1"/>
+              <a:srgbClr val="D9D9D2"/>
             </a:solidFill>
           </a:ln>
         </p:spPr>
@@ -4533,9 +4537,9 @@
             <a:r>
               <a:rPr sz="980" b="0">
                 <a:solidFill>
-                  <a:srgbClr val="0F172A"/>
-                </a:solidFill>
-                <a:latin typeface="Arial"/>
+                  <a:srgbClr val="05164D"/>
+                </a:solidFill>
+                <a:latin typeface="Aptos"/>
               </a:rPr>
               <a:t>Segregated lane; clean telemetry</a:t>
             </a:r>
@@ -4561,7 +4565,7 @@
           </a:solidFill>
           <a:ln w="12700">
             <a:solidFill>
-              <a:srgbClr val="CBD5E1"/>
+              <a:srgbClr val="D9D9D2"/>
             </a:solidFill>
           </a:ln>
         </p:spPr>
@@ -4617,9 +4621,9 @@
             <a:r>
               <a:rPr sz="980" b="0">
                 <a:solidFill>
-                  <a:srgbClr val="0F172A"/>
-                </a:solidFill>
-                <a:latin typeface="Arial"/>
+                  <a:srgbClr val="05164D"/>
+                </a:solidFill>
+                <a:latin typeface="Aptos"/>
               </a:rPr>
               <a:t>PED-B</a:t>
             </a:r>
@@ -4645,7 +4649,7 @@
           </a:solidFill>
           <a:ln w="12700">
             <a:solidFill>
-              <a:srgbClr val="CBD5E1"/>
+              <a:srgbClr val="D9D9D2"/>
             </a:solidFill>
           </a:ln>
         </p:spPr>
@@ -4701,9 +4705,9 @@
             <a:r>
               <a:rPr sz="980" b="0">
                 <a:solidFill>
-                  <a:srgbClr val="0F172A"/>
-                </a:solidFill>
-                <a:latin typeface="Arial"/>
+                  <a:srgbClr val="05164D"/>
+                </a:solidFill>
+                <a:latin typeface="Aptos"/>
               </a:rPr>
               <a:t>2/5</a:t>
             </a:r>
@@ -4729,7 +4733,7 @@
           </a:solidFill>
           <a:ln w="12700">
             <a:solidFill>
-              <a:srgbClr val="CBD5E1"/>
+              <a:srgbClr val="D9D9D2"/>
             </a:solidFill>
           </a:ln>
         </p:spPr>
@@ -4785,9 +4789,9 @@
             <a:r>
               <a:rPr sz="980" b="0">
                 <a:solidFill>
-                  <a:srgbClr val="0F172A"/>
-                </a:solidFill>
-                <a:latin typeface="Arial"/>
+                  <a:srgbClr val="05164D"/>
+                </a:solidFill>
+                <a:latin typeface="Aptos"/>
               </a:rPr>
               <a:t>Force Override</a:t>
             </a:r>
@@ -4813,7 +4817,7 @@
           </a:solidFill>
           <a:ln w="12700">
             <a:solidFill>
-              <a:srgbClr val="CBD5E1"/>
+              <a:srgbClr val="D9D9D2"/>
             </a:solidFill>
           </a:ln>
         </p:spPr>
@@ -4869,9 +4873,9 @@
             <a:r>
               <a:rPr sz="980" b="0">
                 <a:solidFill>
-                  <a:srgbClr val="0F172A"/>
-                </a:solidFill>
-                <a:latin typeface="Arial"/>
+                  <a:srgbClr val="05164D"/>
+                </a:solidFill>
+                <a:latin typeface="Aptos"/>
               </a:rPr>
               <a:t>Segregated lane; malformed lat/long</a:t>
             </a:r>
@@ -4897,7 +4901,7 @@
           </a:solidFill>
           <a:ln w="12700">
             <a:solidFill>
-              <a:srgbClr val="CBD5E1"/>
+              <a:srgbClr val="D9D9D2"/>
             </a:solidFill>
           </a:ln>
         </p:spPr>
@@ -4953,9 +4957,9 @@
             <a:r>
               <a:rPr sz="980" b="0">
                 <a:solidFill>
-                  <a:srgbClr val="0F172A"/>
-                </a:solidFill>
-                <a:latin typeface="Arial"/>
+                  <a:srgbClr val="05164D"/>
+                </a:solidFill>
+                <a:latin typeface="Aptos"/>
               </a:rPr>
               <a:t>PED-C</a:t>
             </a:r>
@@ -4981,7 +4985,7 @@
           </a:solidFill>
           <a:ln w="12700">
             <a:solidFill>
-              <a:srgbClr val="CBD5E1"/>
+              <a:srgbClr val="D9D9D2"/>
             </a:solidFill>
           </a:ln>
         </p:spPr>
@@ -5037,9 +5041,9 @@
             <a:r>
               <a:rPr sz="980" b="0">
                 <a:solidFill>
-                  <a:srgbClr val="0F172A"/>
-                </a:solidFill>
-                <a:latin typeface="Arial"/>
+                  <a:srgbClr val="05164D"/>
+                </a:solidFill>
+                <a:latin typeface="Aptos"/>
               </a:rPr>
               <a:t>3/5</a:t>
             </a:r>
@@ -5065,7 +5069,7 @@
           </a:solidFill>
           <a:ln w="12700">
             <a:solidFill>
-              <a:srgbClr val="CBD5E1"/>
+              <a:srgbClr val="D9D9D2"/>
             </a:solidFill>
           </a:ln>
         </p:spPr>
@@ -5121,9 +5125,9 @@
             <a:r>
               <a:rPr sz="980" b="0">
                 <a:solidFill>
-                  <a:srgbClr val="0F172A"/>
-                </a:solidFill>
-                <a:latin typeface="Arial"/>
+                  <a:srgbClr val="05164D"/>
+                </a:solidFill>
+                <a:latin typeface="Aptos"/>
               </a:rPr>
               <a:t>Force Override</a:t>
             </a:r>
@@ -5149,7 +5153,7 @@
           </a:solidFill>
           <a:ln w="12700">
             <a:solidFill>
-              <a:srgbClr val="CBD5E1"/>
+              <a:srgbClr val="D9D9D2"/>
             </a:solidFill>
           </a:ln>
         </p:spPr>
@@ -5205,9 +5209,9 @@
             <a:r>
               <a:rPr sz="980" b="0">
                 <a:solidFill>
-                  <a:srgbClr val="0F172A"/>
-                </a:solidFill>
-                <a:latin typeface="Arial"/>
+                  <a:srgbClr val="05164D"/>
+                </a:solidFill>
+                <a:latin typeface="Aptos"/>
               </a:rPr>
               <a:t>Segregated lane; clean telemetry</a:t>
             </a:r>
@@ -5233,7 +5237,7 @@
           </a:solidFill>
           <a:ln w="12700">
             <a:solidFill>
-              <a:srgbClr val="CBD5E1"/>
+              <a:srgbClr val="D9D9D2"/>
             </a:solidFill>
           </a:ln>
         </p:spPr>
@@ -5289,9 +5293,9 @@
             <a:r>
               <a:rPr sz="1350" b="1">
                 <a:solidFill>
-                  <a:srgbClr val="1E3A8A"/>
-                </a:solidFill>
-                <a:latin typeface="Arial"/>
+                  <a:srgbClr val="05164D"/>
+                </a:solidFill>
+                <a:latin typeface="Aptos Display"/>
               </a:rPr>
               <a:t>Stable groups</a:t>
             </a:r>
@@ -5328,9 +5332,9 @@
             <a:r>
               <a:rPr sz="1140" b="0">
                 <a:solidFill>
-                  <a:srgbClr val="0F172A"/>
-                </a:solidFill>
-                <a:latin typeface="Arial"/>
+                  <a:srgbClr val="05164D"/>
+                </a:solidFill>
+                <a:latin typeface="Aptos"/>
               </a:rPr>
               <a:t>• Blue hand truck group: 4, 4, 4 and operator kept stop.</a:t>
             </a:r>
@@ -5344,9 +5348,9 @@
             <a:r>
               <a:rPr sz="1140" b="0">
                 <a:solidFill>
-                  <a:srgbClr val="0F172A"/>
-                </a:solidFill>
-                <a:latin typeface="Arial"/>
+                  <a:srgbClr val="05164D"/>
+                </a:solidFill>
+                <a:latin typeface="Aptos"/>
               </a:rPr>
               <a:t>• Reflective silver cargo group: 4, 4, 4 across all three rows.</a:t>
             </a:r>
@@ -5368,11 +5372,11 @@
             <a:avLst/>
           </a:prstGeom>
           <a:solidFill>
-            <a:srgbClr val="EFF6FF"/>
+            <a:srgbClr val="EEF3FF"/>
           </a:solidFill>
           <a:ln w="12700">
             <a:solidFill>
-              <a:srgbClr val="CBD5E1"/>
+              <a:srgbClr val="D9D9D2"/>
             </a:solidFill>
           </a:ln>
         </p:spPr>
@@ -5428,9 +5432,9 @@
             <a:r>
               <a:rPr sz="1300" b="1">
                 <a:solidFill>
-                  <a:srgbClr val="1E3A8A"/>
-                </a:solidFill>
-                <a:latin typeface="Arial"/>
+                  <a:srgbClr val="05164D"/>
+                </a:solidFill>
+                <a:latin typeface="Aptos Display"/>
               </a:rPr>
               <a:t>Conclusion: the observed 2 versus 3 split is localized and input-sensitive, not evidence of broad nondeterminism.</a:t>
             </a:r>
@@ -5451,7 +5455,7 @@
     <p:bg>
       <p:bgPr>
         <a:solidFill>
-          <a:srgbClr val="F8FAFC"/>
+          <a:srgbClr val="FFFFFF"/>
         </a:solidFill>
         <a:effectLst/>
       </p:bgPr>
@@ -5493,9 +5497,9 @@
             <a:r>
               <a:rPr sz="2400" b="1">
                 <a:solidFill>
-                  <a:srgbClr val="0F172A"/>
-                </a:solidFill>
-                <a:latin typeface="Arial"/>
+                  <a:srgbClr val="05164D"/>
+                </a:solidFill>
+                <a:latin typeface="Aptos Display"/>
               </a:rPr>
               <a:t>Challenges, Limitations, and Mitigations</a:t>
             </a:r>
@@ -5510,17 +5514,19 @@
         </p:nvSpPr>
         <p:spPr>
           <a:xfrm>
-            <a:off x="10287000" y="279400"/>
-            <a:ext cx="1371600" cy="304800"/>
+            <a:off x="10134600" y="279400"/>
+            <a:ext cx="1524000" cy="304800"/>
           </a:xfrm>
           <a:prstGeom prst="roundRect">
             <a:avLst/>
           </a:prstGeom>
           <a:solidFill>
-            <a:srgbClr val="DBEAFE"/>
+            <a:srgbClr val="EEF3FF"/>
           </a:solidFill>
-          <a:ln>
-            <a:noFill/>
+          <a:ln w="10160">
+            <a:solidFill>
+              <a:srgbClr val="5999FF"/>
+            </a:solidFill>
           </a:ln>
         </p:spPr>
         <p:style>
@@ -5553,8 +5559,8 @@
         </p:nvSpPr>
         <p:spPr>
           <a:xfrm>
-            <a:off x="10287000" y="330200"/>
-            <a:ext cx="1371600" cy="228600"/>
+            <a:off x="10134600" y="330200"/>
+            <a:ext cx="1524000" cy="228600"/>
           </a:xfrm>
           <a:prstGeom prst="rect">
             <a:avLst/>
@@ -5575,9 +5581,9 @@
             <a:r>
               <a:rPr sz="950" b="1">
                 <a:solidFill>
-                  <a:srgbClr val="1E3A8A"/>
-                </a:solidFill>
-                <a:latin typeface="Arial"/>
+                  <a:srgbClr val="0C35F2"/>
+                </a:solidFill>
+                <a:latin typeface="Aptos Display"/>
               </a:rPr>
               <a:t>LIMITS</a:t>
             </a:r>
@@ -5599,7 +5605,7 @@
             <a:avLst/>
           </a:prstGeom>
           <a:solidFill>
-            <a:srgbClr val="CBD5E1"/>
+            <a:srgbClr val="D9D9D2"/>
           </a:solidFill>
           <a:ln>
             <a:noFill/>
@@ -5657,9 +5663,9 @@
             <a:r>
               <a:rPr sz="850" b="0">
                 <a:solidFill>
-                  <a:srgbClr val="475569"/>
-                </a:solidFill>
-                <a:latin typeface="Arial"/>
+                  <a:srgbClr val="948E8D"/>
+                </a:solidFill>
+                <a:latin typeface="Aptos"/>
               </a:rPr>
               <a:t>AGV Fleet VLA Intelligence</a:t>
             </a:r>
@@ -5696,9 +5702,9 @@
             <a:r>
               <a:rPr sz="850" b="0">
                 <a:solidFill>
-                  <a:srgbClr val="475569"/>
-                </a:solidFill>
-                <a:latin typeface="Arial"/>
+                  <a:srgbClr val="948E8D"/>
+                </a:solidFill>
+                <a:latin typeface="Aptos"/>
               </a:rPr>
               <a:t>11/13</a:t>
             </a:r>
@@ -5720,11 +5726,11 @@
             <a:avLst/>
           </a:prstGeom>
           <a:solidFill>
-            <a:srgbClr val="EFF6FF"/>
+            <a:srgbClr val="EEF3FF"/>
           </a:solidFill>
           <a:ln w="12700">
             <a:solidFill>
-              <a:srgbClr val="CBD5E1"/>
+              <a:srgbClr val="D9D9D2"/>
             </a:solidFill>
           </a:ln>
         </p:spPr>
@@ -5780,9 +5786,9 @@
             <a:r>
               <a:rPr sz="1060" b="1">
                 <a:solidFill>
-                  <a:srgbClr val="0F172A"/>
-                </a:solidFill>
-                <a:latin typeface="Arial"/>
+                  <a:srgbClr val="05164D"/>
+                </a:solidFill>
+                <a:latin typeface="Aptos Display"/>
               </a:rPr>
               <a:t>Challenge</a:t>
             </a:r>
@@ -5804,11 +5810,11 @@
             <a:avLst/>
           </a:prstGeom>
           <a:solidFill>
-            <a:srgbClr val="EFF6FF"/>
+            <a:srgbClr val="EEF3FF"/>
           </a:solidFill>
           <a:ln w="12700">
             <a:solidFill>
-              <a:srgbClr val="CBD5E1"/>
+              <a:srgbClr val="D9D9D2"/>
             </a:solidFill>
           </a:ln>
         </p:spPr>
@@ -5864,9 +5870,9 @@
             <a:r>
               <a:rPr sz="1060" b="1">
                 <a:solidFill>
-                  <a:srgbClr val="0F172A"/>
-                </a:solidFill>
-                <a:latin typeface="Arial"/>
+                  <a:srgbClr val="05164D"/>
+                </a:solidFill>
+                <a:latin typeface="Aptos Display"/>
               </a:rPr>
               <a:t>Effect on evidence</a:t>
             </a:r>
@@ -5888,11 +5894,11 @@
             <a:avLst/>
           </a:prstGeom>
           <a:solidFill>
-            <a:srgbClr val="EFF6FF"/>
+            <a:srgbClr val="EEF3FF"/>
           </a:solidFill>
           <a:ln w="12700">
             <a:solidFill>
-              <a:srgbClr val="CBD5E1"/>
+              <a:srgbClr val="D9D9D2"/>
             </a:solidFill>
           </a:ln>
         </p:spPr>
@@ -5948,9 +5954,9 @@
             <a:r>
               <a:rPr sz="1060" b="1">
                 <a:solidFill>
-                  <a:srgbClr val="0F172A"/>
-                </a:solidFill>
-                <a:latin typeface="Arial"/>
+                  <a:srgbClr val="05164D"/>
+                </a:solidFill>
+                <a:latin typeface="Aptos Display"/>
               </a:rPr>
               <a:t>Mitigation in this project</a:t>
             </a:r>
@@ -5976,7 +5982,7 @@
           </a:solidFill>
           <a:ln w="12700">
             <a:solidFill>
-              <a:srgbClr val="CBD5E1"/>
+              <a:srgbClr val="D9D9D2"/>
             </a:solidFill>
           </a:ln>
         </p:spPr>
@@ -6032,9 +6038,9 @@
             <a:r>
               <a:rPr sz="930" b="0">
                 <a:solidFill>
-                  <a:srgbClr val="0F172A"/>
-                </a:solidFill>
-                <a:latin typeface="Arial"/>
+                  <a:srgbClr val="05164D"/>
+                </a:solidFill>
+                <a:latin typeface="Aptos"/>
               </a:rPr>
               <a:t>Free-tier quota and API project limits</a:t>
             </a:r>
@@ -6060,7 +6066,7 @@
           </a:solidFill>
           <a:ln w="12700">
             <a:solidFill>
-              <a:srgbClr val="CBD5E1"/>
+              <a:srgbClr val="D9D9D2"/>
             </a:solidFill>
           </a:ln>
         </p:spPr>
@@ -6116,9 +6122,9 @@
             <a:r>
               <a:rPr sz="930" b="0">
                 <a:solidFill>
-                  <a:srgbClr val="0F172A"/>
-                </a:solidFill>
-                <a:latin typeface="Arial"/>
+                  <a:srgbClr val="05164D"/>
+                </a:solidFill>
+                <a:latin typeface="Aptos"/>
               </a:rPr>
               <a:t>Model-side reruns could not be scaled credibly</a:t>
             </a:r>
@@ -6144,7 +6150,7 @@
           </a:solidFill>
           <a:ln w="12700">
             <a:solidFill>
-              <a:srgbClr val="CBD5E1"/>
+              <a:srgbClr val="D9D9D2"/>
             </a:solidFill>
           </a:ln>
         </p:spPr>
@@ -6200,9 +6206,9 @@
             <a:r>
               <a:rPr sz="930" b="0">
                 <a:solidFill>
-                  <a:srgbClr val="0F172A"/>
-                </a:solidFill>
-                <a:latin typeface="Arial"/>
+                  <a:srgbClr val="05164D"/>
+                </a:solidFill>
+                <a:latin typeface="Aptos"/>
               </a:rPr>
               <a:t>Reported the offline audit truthfully and kept a quota-safe probe harness ready</a:t>
             </a:r>
@@ -6228,7 +6234,7 @@
           </a:solidFill>
           <a:ln w="12700">
             <a:solidFill>
-              <a:srgbClr val="CBD5E1"/>
+              <a:srgbClr val="D9D9D2"/>
             </a:solidFill>
           </a:ln>
         </p:spPr>
@@ -6284,9 +6290,9 @@
             <a:r>
               <a:rPr sz="930" b="0">
                 <a:solidFill>
-                  <a:srgbClr val="0F172A"/>
-                </a:solidFill>
-                <a:latin typeface="Arial"/>
+                  <a:srgbClr val="05164D"/>
+                </a:solidFill>
+                <a:latin typeface="Aptos"/>
               </a:rPr>
               <a:t>Small pilot benchmark</a:t>
             </a:r>
@@ -6312,7 +6318,7 @@
           </a:solidFill>
           <a:ln w="12700">
             <a:solidFill>
-              <a:srgbClr val="CBD5E1"/>
+              <a:srgbClr val="D9D9D2"/>
             </a:solidFill>
           </a:ln>
         </p:spPr>
@@ -6368,9 +6374,9 @@
             <a:r>
               <a:rPr sz="930" b="0">
                 <a:solidFill>
-                  <a:srgbClr val="0F172A"/>
-                </a:solidFill>
-                <a:latin typeface="Arial"/>
+                  <a:srgbClr val="05164D"/>
+                </a:solidFill>
+                <a:latin typeface="Aptos"/>
               </a:rPr>
               <a:t>No strong statistical performance claim is justified</a:t>
             </a:r>
@@ -6396,7 +6402,7 @@
           </a:solidFill>
           <a:ln w="12700">
             <a:solidFill>
-              <a:srgbClr val="CBD5E1"/>
+              <a:srgbClr val="D9D9D2"/>
             </a:solidFill>
           </a:ln>
         </p:spPr>
@@ -6452,9 +6458,9 @@
             <a:r>
               <a:rPr sz="930" b="0">
                 <a:solidFill>
-                  <a:srgbClr val="0F172A"/>
-                </a:solidFill>
-                <a:latin typeface="Arial"/>
+                  <a:srgbClr val="05164D"/>
+                </a:solidFill>
+                <a:latin typeface="Aptos"/>
               </a:rPr>
               <a:t>Framed results as prototype evidence and audit evidence only</a:t>
             </a:r>
@@ -6480,7 +6486,7 @@
           </a:solidFill>
           <a:ln w="12700">
             <a:solidFill>
-              <a:srgbClr val="CBD5E1"/>
+              <a:srgbClr val="D9D9D2"/>
             </a:solidFill>
           </a:ln>
         </p:spPr>
@@ -6536,9 +6542,9 @@
             <a:r>
               <a:rPr sz="930" b="0">
                 <a:solidFill>
-                  <a:srgbClr val="0F172A"/>
-                </a:solidFill>
-                <a:latin typeface="Arial"/>
+                  <a:srgbClr val="05164D"/>
+                </a:solidFill>
+                <a:latin typeface="Aptos"/>
               </a:rPr>
               <a:t>Manual telemetry entry in the prototype</a:t>
             </a:r>
@@ -6564,7 +6570,7 @@
           </a:solidFill>
           <a:ln w="12700">
             <a:solidFill>
-              <a:srgbClr val="CBD5E1"/>
+              <a:srgbClr val="D9D9D2"/>
             </a:solidFill>
           </a:ln>
         </p:spPr>
@@ -6620,9 +6626,9 @@
             <a:r>
               <a:rPr sz="930" b="0">
                 <a:solidFill>
-                  <a:srgbClr val="0F172A"/>
-                </a:solidFill>
-                <a:latin typeface="Arial"/>
+                  <a:srgbClr val="05164D"/>
+                </a:solidFill>
+                <a:latin typeface="Aptos"/>
               </a:rPr>
               <a:t>Operator-entered inputs can introduce noise or malformed fields</a:t>
             </a:r>
@@ -6648,7 +6654,7 @@
           </a:solidFill>
           <a:ln w="12700">
             <a:solidFill>
-              <a:srgbClr val="CBD5E1"/>
+              <a:srgbClr val="D9D9D2"/>
             </a:solidFill>
           </a:ln>
         </p:spPr>
@@ -6704,9 +6710,9 @@
             <a:r>
               <a:rPr sz="930" b="0">
                 <a:solidFill>
-                  <a:srgbClr val="0F172A"/>
-                </a:solidFill>
-                <a:latin typeface="Arial"/>
+                  <a:srgbClr val="05164D"/>
+                </a:solidFill>
+                <a:latin typeface="Aptos"/>
               </a:rPr>
               <a:t>Included telemetry anomalies explicitly in the operational audit</a:t>
             </a:r>
@@ -6732,7 +6738,7 @@
           </a:solidFill>
           <a:ln w="12700">
             <a:solidFill>
-              <a:srgbClr val="CBD5E1"/>
+              <a:srgbClr val="D9D9D2"/>
             </a:solidFill>
           </a:ln>
         </p:spPr>
@@ -6788,9 +6794,9 @@
             <a:r>
               <a:rPr sz="930" b="0">
                 <a:solidFill>
-                  <a:srgbClr val="0F172A"/>
-                </a:solidFill>
-                <a:latin typeface="Arial"/>
+                  <a:srgbClr val="05164D"/>
+                </a:solidFill>
+                <a:latin typeface="Aptos"/>
               </a:rPr>
               <a:t>Text-surrogate benchmark inputs</a:t>
             </a:r>
@@ -6816,7 +6822,7 @@
           </a:solidFill>
           <a:ln w="12700">
             <a:solidFill>
-              <a:srgbClr val="CBD5E1"/>
+              <a:srgbClr val="D9D9D2"/>
             </a:solidFill>
           </a:ln>
         </p:spPr>
@@ -6872,9 +6878,9 @@
             <a:r>
               <a:rPr sz="930" b="0">
                 <a:solidFill>
-                  <a:srgbClr val="0F172A"/>
-                </a:solidFill>
-                <a:latin typeface="Arial"/>
+                  <a:srgbClr val="05164D"/>
+                </a:solidFill>
+                <a:latin typeface="Aptos"/>
               </a:rPr>
               <a:t>Benchmark does not fully match raw-media production conditions</a:t>
             </a:r>
@@ -6900,7 +6906,7 @@
           </a:solidFill>
           <a:ln w="12700">
             <a:solidFill>
-              <a:srgbClr val="CBD5E1"/>
+              <a:srgbClr val="D9D9D2"/>
             </a:solidFill>
           </a:ln>
         </p:spPr>
@@ -6956,9 +6962,9 @@
             <a:r>
               <a:rPr sz="930" b="0">
                 <a:solidFill>
-                  <a:srgbClr val="0F172A"/>
-                </a:solidFill>
-                <a:latin typeface="Arial"/>
+                  <a:srgbClr val="05164D"/>
+                </a:solidFill>
+                <a:latin typeface="Aptos"/>
               </a:rPr>
               <a:t>Separated the pilot benchmark from the operational dashboard audit</a:t>
             </a:r>
@@ -6984,7 +6990,7 @@
           </a:solidFill>
           <a:ln w="12700">
             <a:solidFill>
-              <a:srgbClr val="CBD5E1"/>
+              <a:srgbClr val="D9D9D2"/>
             </a:solidFill>
           </a:ln>
         </p:spPr>
@@ -7040,9 +7046,9 @@
             <a:r>
               <a:rPr sz="930" b="0">
                 <a:solidFill>
-                  <a:srgbClr val="0F172A"/>
-                </a:solidFill>
-                <a:latin typeface="Arial"/>
+                  <a:srgbClr val="05164D"/>
+                </a:solidFill>
+                <a:latin typeface="Aptos"/>
               </a:rPr>
               <a:t>No formal HCI field study</a:t>
             </a:r>
@@ -7068,7 +7074,7 @@
           </a:solidFill>
           <a:ln w="12700">
             <a:solidFill>
-              <a:srgbClr val="CBD5E1"/>
+              <a:srgbClr val="D9D9D2"/>
             </a:solidFill>
           </a:ln>
         </p:spPr>
@@ -7124,9 +7130,9 @@
             <a:r>
               <a:rPr sz="930" b="0">
                 <a:solidFill>
-                  <a:srgbClr val="0F172A"/>
-                </a:solidFill>
-                <a:latin typeface="Arial"/>
+                  <a:srgbClr val="05164D"/>
+                </a:solidFill>
+                <a:latin typeface="Aptos"/>
               </a:rPr>
               <a:t>Operator trust and speed effects remain unvalidated</a:t>
             </a:r>
@@ -7152,7 +7158,7 @@
           </a:solidFill>
           <a:ln w="12700">
             <a:solidFill>
-              <a:srgbClr val="CBD5E1"/>
+              <a:srgbClr val="D9D9D2"/>
             </a:solidFill>
           </a:ln>
         </p:spPr>
@@ -7208,9 +7214,9 @@
             <a:r>
               <a:rPr sz="930" b="0">
                 <a:solidFill>
-                  <a:srgbClr val="0F172A"/>
-                </a:solidFill>
-                <a:latin typeface="Arial"/>
+                  <a:srgbClr val="05164D"/>
+                </a:solidFill>
+                <a:latin typeface="Aptos"/>
               </a:rPr>
               <a:t>Positioned HCI evaluation as future work</a:t>
             </a:r>
@@ -7232,11 +7238,11 @@
             <a:avLst/>
           </a:prstGeom>
           <a:solidFill>
-            <a:srgbClr val="EFF6FF"/>
+            <a:srgbClr val="EEF3FF"/>
           </a:solidFill>
           <a:ln w="12700">
             <a:solidFill>
-              <a:srgbClr val="CBD5E1"/>
+              <a:srgbClr val="D9D9D2"/>
             </a:solidFill>
           </a:ln>
         </p:spPr>
@@ -7292,9 +7298,9 @@
             <a:r>
               <a:rPr sz="1120" b="1">
                 <a:solidFill>
-                  <a:srgbClr val="B45309"/>
-                </a:solidFill>
-                <a:latin typeface="Arial"/>
+                  <a:srgbClr val="706254"/>
+                </a:solidFill>
+                <a:latin typeface="Aptos Display"/>
               </a:rPr>
               <a:t>The advisory-only system boundary is intentional and remains appropriate given current VLM spatial-reasoning limits.</a:t>
             </a:r>
@@ -7315,7 +7321,7 @@
     <p:bg>
       <p:bgPr>
         <a:solidFill>
-          <a:srgbClr val="F8FAFC"/>
+          <a:srgbClr val="FFFFFF"/>
         </a:solidFill>
         <a:effectLst/>
       </p:bgPr>
@@ -7357,9 +7363,9 @@
             <a:r>
               <a:rPr sz="2400" b="1">
                 <a:solidFill>
-                  <a:srgbClr val="0F172A"/>
-                </a:solidFill>
-                <a:latin typeface="Arial"/>
+                  <a:srgbClr val="05164D"/>
+                </a:solidFill>
+                <a:latin typeface="Aptos Display"/>
               </a:rPr>
               <a:t>Conclusion and Future Work</a:t>
             </a:r>
@@ -7374,17 +7380,19 @@
         </p:nvSpPr>
         <p:spPr>
           <a:xfrm>
-            <a:off x="10287000" y="279400"/>
-            <a:ext cx="1371600" cy="304800"/>
+            <a:off x="10134600" y="279400"/>
+            <a:ext cx="1524000" cy="304800"/>
           </a:xfrm>
           <a:prstGeom prst="roundRect">
             <a:avLst/>
           </a:prstGeom>
           <a:solidFill>
-            <a:srgbClr val="DBEAFE"/>
+            <a:srgbClr val="EEF3FF"/>
           </a:solidFill>
-          <a:ln>
-            <a:noFill/>
+          <a:ln w="10160">
+            <a:solidFill>
+              <a:srgbClr val="5999FF"/>
+            </a:solidFill>
           </a:ln>
         </p:spPr>
         <p:style>
@@ -7417,8 +7425,8 @@
         </p:nvSpPr>
         <p:spPr>
           <a:xfrm>
-            <a:off x="10287000" y="330200"/>
-            <a:ext cx="1371600" cy="228600"/>
+            <a:off x="10134600" y="330200"/>
+            <a:ext cx="1524000" cy="228600"/>
           </a:xfrm>
           <a:prstGeom prst="rect">
             <a:avLst/>
@@ -7439,9 +7447,9 @@
             <a:r>
               <a:rPr sz="950" b="1">
                 <a:solidFill>
-                  <a:srgbClr val="1E3A8A"/>
-                </a:solidFill>
-                <a:latin typeface="Arial"/>
+                  <a:srgbClr val="0C35F2"/>
+                </a:solidFill>
+                <a:latin typeface="Aptos Display"/>
               </a:rPr>
               <a:t>OUTLOOK</a:t>
             </a:r>
@@ -7463,7 +7471,7 @@
             <a:avLst/>
           </a:prstGeom>
           <a:solidFill>
-            <a:srgbClr val="CBD5E1"/>
+            <a:srgbClr val="D9D9D2"/>
           </a:solidFill>
           <a:ln>
             <a:noFill/>
@@ -7521,9 +7529,9 @@
             <a:r>
               <a:rPr sz="850" b="0">
                 <a:solidFill>
-                  <a:srgbClr val="475569"/>
-                </a:solidFill>
-                <a:latin typeface="Arial"/>
+                  <a:srgbClr val="948E8D"/>
+                </a:solidFill>
+                <a:latin typeface="Aptos"/>
               </a:rPr>
               <a:t>AGV Fleet VLA Intelligence</a:t>
             </a:r>
@@ -7560,9 +7568,9 @@
             <a:r>
               <a:rPr sz="850" b="0">
                 <a:solidFill>
-                  <a:srgbClr val="475569"/>
-                </a:solidFill>
-                <a:latin typeface="Arial"/>
+                  <a:srgbClr val="948E8D"/>
+                </a:solidFill>
+                <a:latin typeface="Aptos"/>
               </a:rPr>
               <a:t>12/13</a:t>
             </a:r>
@@ -7588,7 +7596,7 @@
           </a:solidFill>
           <a:ln w="12700">
             <a:solidFill>
-              <a:srgbClr val="CBD5E1"/>
+              <a:srgbClr val="D9D9D2"/>
             </a:solidFill>
           </a:ln>
         </p:spPr>
@@ -7644,9 +7652,9 @@
             <a:r>
               <a:rPr sz="1450" b="1">
                 <a:solidFill>
-                  <a:srgbClr val="1E3A8A"/>
-                </a:solidFill>
-                <a:latin typeface="Arial"/>
+                  <a:srgbClr val="05164D"/>
+                </a:solidFill>
+                <a:latin typeface="Aptos Display"/>
               </a:rPr>
               <a:t>Key takeaways</a:t>
             </a:r>
@@ -7683,9 +7691,9 @@
             <a:r>
               <a:rPr sz="1240" b="0">
                 <a:solidFill>
-                  <a:srgbClr val="0F172A"/>
-                </a:solidFill>
-                <a:latin typeface="Arial"/>
+                  <a:srgbClr val="05164D"/>
+                </a:solidFill>
+                <a:latin typeface="Aptos"/>
               </a:rPr>
               <a:t>• A working multimodal AGV advisory prototype was implemented.</a:t>
             </a:r>
@@ -7699,9 +7707,9 @@
             <a:r>
               <a:rPr sz="1240" b="0">
                 <a:solidFill>
-                  <a:srgbClr val="0F172A"/>
-                </a:solidFill>
-                <a:latin typeface="Arial"/>
+                  <a:srgbClr val="05164D"/>
+                </a:solidFill>
+                <a:latin typeface="Aptos"/>
               </a:rPr>
               <a:t>• The strongest contribution is the operator workflow, persistence layer, and traceability design.</a:t>
             </a:r>
@@ -7715,9 +7723,9 @@
             <a:r>
               <a:rPr sz="1240" b="0">
                 <a:solidFill>
-                  <a:srgbClr val="0F172A"/>
-                </a:solidFill>
-                <a:latin typeface="Arial"/>
+                  <a:srgbClr val="05164D"/>
+                </a:solidFill>
+                <a:latin typeface="Aptos"/>
               </a:rPr>
               <a:t>• The present evidence is limited but honest, reproducible, and appropriate for a masters-level prototype.</a:t>
             </a:r>
@@ -7743,7 +7751,7 @@
           </a:solidFill>
           <a:ln w="12700">
             <a:solidFill>
-              <a:srgbClr val="CBD5E1"/>
+              <a:srgbClr val="D9D9D2"/>
             </a:solidFill>
           </a:ln>
         </p:spPr>
@@ -7799,9 +7807,9 @@
             <a:r>
               <a:rPr sz="1450" b="1">
                 <a:solidFill>
-                  <a:srgbClr val="1E3A8A"/>
-                </a:solidFill>
-                <a:latin typeface="Arial"/>
+                  <a:srgbClr val="05164D"/>
+                </a:solidFill>
+                <a:latin typeface="Aptos Display"/>
               </a:rPr>
               <a:t>Future work</a:t>
             </a:r>
@@ -7823,11 +7831,11 @@
             <a:avLst/>
           </a:prstGeom>
           <a:solidFill>
-            <a:srgbClr val="EFF6FF"/>
+            <a:srgbClr val="EEF3FF"/>
           </a:solidFill>
           <a:ln w="12700">
             <a:solidFill>
-              <a:srgbClr val="CBD5E1"/>
+              <a:srgbClr val="D9D9D2"/>
             </a:solidFill>
           </a:ln>
         </p:spPr>
@@ -7883,9 +7891,9 @@
             <a:r>
               <a:rPr sz="1140" b="1">
                 <a:solidFill>
-                  <a:srgbClr val="0F172A"/>
-                </a:solidFill>
-                <a:latin typeface="Arial"/>
+                  <a:srgbClr val="05164D"/>
+                </a:solidFill>
+                <a:latin typeface="Aptos Display"/>
               </a:rPr>
               <a:t>Expand the benchmark from 4 scenarios to a wider and more varied case set.</a:t>
             </a:r>
@@ -7907,11 +7915,11 @@
             <a:avLst/>
           </a:prstGeom>
           <a:solidFill>
-            <a:srgbClr val="EFF6FF"/>
+            <a:srgbClr val="EEF3FF"/>
           </a:solidFill>
           <a:ln w="12700">
             <a:solidFill>
-              <a:srgbClr val="CBD5E1"/>
+              <a:srgbClr val="D9D9D2"/>
             </a:solidFill>
           </a:ln>
         </p:spPr>
@@ -7967,9 +7975,9 @@
             <a:r>
               <a:rPr sz="1140" b="1">
                 <a:solidFill>
-                  <a:srgbClr val="0F172A"/>
-                </a:solidFill>
-                <a:latin typeface="Arial"/>
+                  <a:srgbClr val="05164D"/>
+                </a:solidFill>
+                <a:latin typeface="Aptos Display"/>
               </a:rPr>
               <a:t>Automate live telemetry ingestion through an API or streaming interface.</a:t>
             </a:r>
@@ -7991,11 +7999,11 @@
             <a:avLst/>
           </a:prstGeom>
           <a:solidFill>
-            <a:srgbClr val="EFF6FF"/>
+            <a:srgbClr val="EEF3FF"/>
           </a:solidFill>
           <a:ln w="12700">
             <a:solidFill>
-              <a:srgbClr val="CBD5E1"/>
+              <a:srgbClr val="D9D9D2"/>
             </a:solidFill>
           </a:ln>
         </p:spPr>
@@ -8051,9 +8059,9 @@
             <a:r>
               <a:rPr sz="1140" b="1">
                 <a:solidFill>
-                  <a:srgbClr val="0F172A"/>
-                </a:solidFill>
-                <a:latin typeface="Arial"/>
+                  <a:srgbClr val="05164D"/>
+                </a:solidFill>
+                <a:latin typeface="Aptos Display"/>
               </a:rPr>
               <a:t>Move benchmark coverage from text surrogates to raw media inputs.</a:t>
             </a:r>
@@ -8075,11 +8083,11 @@
             <a:avLst/>
           </a:prstGeom>
           <a:solidFill>
-            <a:srgbClr val="EFF6FF"/>
+            <a:srgbClr val="EEF3FF"/>
           </a:solidFill>
           <a:ln w="12700">
             <a:solidFill>
-              <a:srgbClr val="CBD5E1"/>
+              <a:srgbClr val="D9D9D2"/>
             </a:solidFill>
           </a:ln>
         </p:spPr>
@@ -8135,9 +8143,9 @@
             <a:r>
               <a:rPr sz="1140" b="1">
                 <a:solidFill>
-                  <a:srgbClr val="0F172A"/>
-                </a:solidFill>
-                <a:latin typeface="Arial"/>
+                  <a:srgbClr val="05164D"/>
+                </a:solidFill>
+                <a:latin typeface="Aptos Display"/>
               </a:rPr>
               <a:t>Run an HCI study on operator trust, explanation quality, and review speed.</a:t>
             </a:r>
@@ -8159,11 +8167,11 @@
             <a:avLst/>
           </a:prstGeom>
           <a:solidFill>
-            <a:srgbClr val="EFF6FF"/>
+            <a:srgbClr val="EEF3FF"/>
           </a:solidFill>
           <a:ln w="12700">
             <a:solidFill>
-              <a:srgbClr val="CBD5E1"/>
+              <a:srgbClr val="D9D9D2"/>
             </a:solidFill>
           </a:ln>
         </p:spPr>
@@ -8219,9 +8227,9 @@
             <a:r>
               <a:rPr sz="1400" b="1">
                 <a:solidFill>
-                  <a:srgbClr val="1E3A8A"/>
-                </a:solidFill>
-                <a:latin typeface="Arial"/>
+                  <a:srgbClr val="05164D"/>
+                </a:solidFill>
+                <a:latin typeface="Aptos Display"/>
               </a:rPr>
               <a:t>Best positioning: a credible academic prototype with a clear path to stronger evaluation.</a:t>
             </a:r>
@@ -8242,7 +8250,7 @@
     <p:bg>
       <p:bgPr>
         <a:solidFill>
-          <a:srgbClr val="F8FAFC"/>
+          <a:srgbClr val="FFFFFF"/>
         </a:solidFill>
         <a:effectLst/>
       </p:bgPr>
@@ -8284,9 +8292,9 @@
             <a:r>
               <a:rPr sz="2400" b="1">
                 <a:solidFill>
-                  <a:srgbClr val="0F172A"/>
-                </a:solidFill>
-                <a:latin typeface="Arial"/>
+                  <a:srgbClr val="05164D"/>
+                </a:solidFill>
+                <a:latin typeface="Aptos Display"/>
               </a:rPr>
               <a:t>Appendix: Selected References</a:t>
             </a:r>
@@ -8301,17 +8309,19 @@
         </p:nvSpPr>
         <p:spPr>
           <a:xfrm>
-            <a:off x="10287000" y="279400"/>
-            <a:ext cx="1371600" cy="304800"/>
+            <a:off x="10134600" y="279400"/>
+            <a:ext cx="1524000" cy="304800"/>
           </a:xfrm>
           <a:prstGeom prst="roundRect">
             <a:avLst/>
           </a:prstGeom>
           <a:solidFill>
-            <a:srgbClr val="DBEAFE"/>
+            <a:srgbClr val="EEF3FF"/>
           </a:solidFill>
-          <a:ln>
-            <a:noFill/>
+          <a:ln w="10160">
+            <a:solidFill>
+              <a:srgbClr val="5999FF"/>
+            </a:solidFill>
           </a:ln>
         </p:spPr>
         <p:style>
@@ -8344,8 +8354,8 @@
         </p:nvSpPr>
         <p:spPr>
           <a:xfrm>
-            <a:off x="10287000" y="330200"/>
-            <a:ext cx="1371600" cy="228600"/>
+            <a:off x="10134600" y="330200"/>
+            <a:ext cx="1524000" cy="228600"/>
           </a:xfrm>
           <a:prstGeom prst="rect">
             <a:avLst/>
@@ -8366,9 +8376,9 @@
             <a:r>
               <a:rPr sz="950" b="1">
                 <a:solidFill>
-                  <a:srgbClr val="1E3A8A"/>
-                </a:solidFill>
-                <a:latin typeface="Arial"/>
+                  <a:srgbClr val="0C35F2"/>
+                </a:solidFill>
+                <a:latin typeface="Aptos Display"/>
               </a:rPr>
               <a:t>APPENDIX</a:t>
             </a:r>
@@ -8390,7 +8400,7 @@
             <a:avLst/>
           </a:prstGeom>
           <a:solidFill>
-            <a:srgbClr val="CBD5E1"/>
+            <a:srgbClr val="D9D9D2"/>
           </a:solidFill>
           <a:ln>
             <a:noFill/>
@@ -8448,9 +8458,9 @@
             <a:r>
               <a:rPr sz="850" b="0">
                 <a:solidFill>
-                  <a:srgbClr val="475569"/>
-                </a:solidFill>
-                <a:latin typeface="Arial"/>
+                  <a:srgbClr val="948E8D"/>
+                </a:solidFill>
+                <a:latin typeface="Aptos"/>
               </a:rPr>
               <a:t>AGV Fleet VLA Intelligence</a:t>
             </a:r>
@@ -8487,9 +8497,9 @@
             <a:r>
               <a:rPr sz="850" b="0">
                 <a:solidFill>
-                  <a:srgbClr val="475569"/>
-                </a:solidFill>
-                <a:latin typeface="Arial"/>
+                  <a:srgbClr val="948E8D"/>
+                </a:solidFill>
+                <a:latin typeface="Aptos"/>
               </a:rPr>
               <a:t>13/13</a:t>
             </a:r>
@@ -8515,7 +8525,7 @@
           </a:solidFill>
           <a:ln w="12700">
             <a:solidFill>
-              <a:srgbClr val="CBD5E1"/>
+              <a:srgbClr val="D9D9D2"/>
             </a:solidFill>
           </a:ln>
         </p:spPr>
@@ -8571,9 +8581,9 @@
             <a:r>
               <a:rPr sz="1450" b="1">
                 <a:solidFill>
-                  <a:srgbClr val="1E3A8A"/>
-                </a:solidFill>
-                <a:latin typeface="Arial"/>
+                  <a:srgbClr val="05164D"/>
+                </a:solidFill>
+                <a:latin typeface="Aptos Display"/>
               </a:rPr>
               <a:t>Selected literature</a:t>
             </a:r>
@@ -8610,9 +8620,9 @@
             <a:r>
               <a:rPr sz="1280" b="0">
                 <a:solidFill>
-                  <a:srgbClr val="0F172A"/>
-                </a:solidFill>
-                <a:latin typeface="Arial"/>
+                  <a:srgbClr val="05164D"/>
+                </a:solidFill>
+                <a:latin typeface="Aptos"/>
               </a:rPr>
               <a:t>• Ahn et al. (2022) - SayCan: grounded language for robotics.</a:t>
             </a:r>
@@ -8626,9 +8636,9 @@
             <a:r>
               <a:rPr sz="1280" b="0">
                 <a:solidFill>
-                  <a:srgbClr val="0F172A"/>
-                </a:solidFill>
-                <a:latin typeface="Arial"/>
+                  <a:srgbClr val="05164D"/>
+                </a:solidFill>
+                <a:latin typeface="Aptos"/>
               </a:rPr>
               <a:t>• Brohan et al. (2023) - RT-2: vision-language-action modeling for robots.</a:t>
             </a:r>
@@ -8642,9 +8652,9 @@
             <a:r>
               <a:rPr sz="1280" b="0">
                 <a:solidFill>
-                  <a:srgbClr val="0F172A"/>
-                </a:solidFill>
-                <a:latin typeface="Arial"/>
+                  <a:srgbClr val="05164D"/>
+                </a:solidFill>
+                <a:latin typeface="Aptos"/>
               </a:rPr>
               <a:t>• Tian et al. (2024) - DriveVLM: staged reasoning for autonomous driving.</a:t>
             </a:r>
@@ -8658,9 +8668,9 @@
             <a:r>
               <a:rPr sz="1280" b="0">
                 <a:solidFill>
-                  <a:srgbClr val="0F172A"/>
-                </a:solidFill>
-                <a:latin typeface="Arial"/>
+                  <a:srgbClr val="05164D"/>
+                </a:solidFill>
+                <a:latin typeface="Aptos"/>
               </a:rPr>
               <a:t>• Parr et al. (2024) - remote monitoring, assistance, management, and driving.</a:t>
             </a:r>
@@ -8674,9 +8684,9 @@
             <a:r>
               <a:rPr sz="1280" b="0">
                 <a:solidFill>
-                  <a:srgbClr val="0F172A"/>
-                </a:solidFill>
-                <a:latin typeface="Arial"/>
+                  <a:srgbClr val="05164D"/>
+                </a:solidFill>
+                <a:latin typeface="Aptos"/>
               </a:rPr>
               <a:t>• Guo et al. (2024) - SURDS: spatial reasoning limitations in multimodal models.</a:t>
             </a:r>
@@ -8698,11 +8708,11 @@
             <a:avLst/>
           </a:prstGeom>
           <a:solidFill>
-            <a:srgbClr val="EFF6FF"/>
+            <a:srgbClr val="EEF3FF"/>
           </a:solidFill>
           <a:ln w="12700">
             <a:solidFill>
-              <a:srgbClr val="CBD5E1"/>
+              <a:srgbClr val="D9D9D2"/>
             </a:solidFill>
           </a:ln>
         </p:spPr>
@@ -8758,9 +8768,9 @@
             <a:r>
               <a:rPr sz="1100" b="0">
                 <a:solidFill>
-                  <a:srgbClr val="475569"/>
-                </a:solidFill>
-                <a:latin typeface="Arial"/>
+                  <a:srgbClr val="595452"/>
+                </a:solidFill>
+                <a:latin typeface="Aptos"/>
               </a:rPr>
               <a:t>The full bibliography and methodological detail are documented in the project report.</a:t>
             </a:r>
@@ -8781,7 +8791,7 @@
     <p:bg>
       <p:bgPr>
         <a:solidFill>
-          <a:srgbClr val="F8FAFC"/>
+          <a:srgbClr val="FFFFFF"/>
         </a:solidFill>
         <a:effectLst/>
       </p:bgPr>
@@ -8823,9 +8833,9 @@
             <a:r>
               <a:rPr sz="2400" b="1">
                 <a:solidFill>
-                  <a:srgbClr val="0F172A"/>
-                </a:solidFill>
-                <a:latin typeface="Arial"/>
+                  <a:srgbClr val="05164D"/>
+                </a:solidFill>
+                <a:latin typeface="Aptos Display"/>
               </a:rPr>
               <a:t>Problem and Motivation</a:t>
             </a:r>
@@ -8840,17 +8850,19 @@
         </p:nvSpPr>
         <p:spPr>
           <a:xfrm>
-            <a:off x="10287000" y="279400"/>
-            <a:ext cx="1371600" cy="304800"/>
+            <a:off x="10134600" y="279400"/>
+            <a:ext cx="1524000" cy="304800"/>
           </a:xfrm>
           <a:prstGeom prst="roundRect">
             <a:avLst/>
           </a:prstGeom>
           <a:solidFill>
-            <a:srgbClr val="DBEAFE"/>
+            <a:srgbClr val="EEF3FF"/>
           </a:solidFill>
-          <a:ln>
-            <a:noFill/>
+          <a:ln w="10160">
+            <a:solidFill>
+              <a:srgbClr val="5999FF"/>
+            </a:solidFill>
           </a:ln>
         </p:spPr>
         <p:style>
@@ -8883,8 +8895,8 @@
         </p:nvSpPr>
         <p:spPr>
           <a:xfrm>
-            <a:off x="10287000" y="330200"/>
-            <a:ext cx="1371600" cy="228600"/>
+            <a:off x="10134600" y="330200"/>
+            <a:ext cx="1524000" cy="228600"/>
           </a:xfrm>
           <a:prstGeom prst="rect">
             <a:avLst/>
@@ -8905,9 +8917,9 @@
             <a:r>
               <a:rPr sz="950" b="1">
                 <a:solidFill>
-                  <a:srgbClr val="1E3A8A"/>
-                </a:solidFill>
-                <a:latin typeface="Arial"/>
+                  <a:srgbClr val="0C35F2"/>
+                </a:solidFill>
+                <a:latin typeface="Aptos Display"/>
               </a:rPr>
               <a:t>PROBLEM</a:t>
             </a:r>
@@ -8929,7 +8941,7 @@
             <a:avLst/>
           </a:prstGeom>
           <a:solidFill>
-            <a:srgbClr val="CBD5E1"/>
+            <a:srgbClr val="D9D9D2"/>
           </a:solidFill>
           <a:ln>
             <a:noFill/>
@@ -8987,9 +8999,9 @@
             <a:r>
               <a:rPr sz="850" b="0">
                 <a:solidFill>
-                  <a:srgbClr val="475569"/>
-                </a:solidFill>
-                <a:latin typeface="Arial"/>
+                  <a:srgbClr val="948E8D"/>
+                </a:solidFill>
+                <a:latin typeface="Aptos"/>
               </a:rPr>
               <a:t>AGV Fleet VLA Intelligence</a:t>
             </a:r>
@@ -9026,9 +9038,9 @@
             <a:r>
               <a:rPr sz="850" b="0">
                 <a:solidFill>
-                  <a:srgbClr val="475569"/>
-                </a:solidFill>
-                <a:latin typeface="Arial"/>
+                  <a:srgbClr val="948E8D"/>
+                </a:solidFill>
+                <a:latin typeface="Aptos"/>
               </a:rPr>
               <a:t>2/13</a:t>
             </a:r>
@@ -9065,9 +9077,9 @@
             <a:r>
               <a:rPr sz="1420" b="0">
                 <a:solidFill>
-                  <a:srgbClr val="0F172A"/>
-                </a:solidFill>
-                <a:latin typeface="Arial"/>
+                  <a:srgbClr val="05164D"/>
+                </a:solidFill>
+                <a:latin typeface="Aptos"/>
               </a:rPr>
               <a:t>• False-positive AGV stops reduce throughput and increase operator workload.</a:t>
             </a:r>
@@ -9081,9 +9093,9 @@
             <a:r>
               <a:rPr sz="1420" b="0">
                 <a:solidFill>
-                  <a:srgbClr val="0F172A"/>
-                </a:solidFill>
-                <a:latin typeface="Arial"/>
+                  <a:srgbClr val="05164D"/>
+                </a:solidFill>
+                <a:latin typeface="Aptos"/>
               </a:rPr>
               <a:t>• Range sensors can detect distance, but not whether the obstacle is harmless or dangerous.</a:t>
             </a:r>
@@ -9097,9 +9109,9 @@
             <a:r>
               <a:rPr sz="1420" b="0">
                 <a:solidFill>
-                  <a:srgbClr val="0F172A"/>
-                </a:solidFill>
-                <a:latin typeface="Arial"/>
+                  <a:srgbClr val="05164D"/>
+                </a:solidFill>
+                <a:latin typeface="Aptos"/>
               </a:rPr>
               <a:t>• Lightweight foil, wrapping film, paper, and soft barriers can trigger the same stop logic as real hazards.</a:t>
             </a:r>
@@ -9113,9 +9125,9 @@
             <a:r>
               <a:rPr sz="1420" b="0">
                 <a:solidFill>
-                  <a:srgbClr val="0F172A"/>
-                </a:solidFill>
-                <a:latin typeface="Arial"/>
+                  <a:srgbClr val="05164D"/>
+                </a:solidFill>
+                <a:latin typeface="Aptos"/>
               </a:rPr>
               <a:t>• Operators need faster context to distinguish nuisance stops from genuine risk without removing human authority.</a:t>
             </a:r>
@@ -9141,7 +9153,7 @@
           </a:solidFill>
           <a:ln w="12700">
             <a:solidFill>
-              <a:srgbClr val="CBD5E1"/>
+              <a:srgbClr val="D9D9D2"/>
             </a:solidFill>
           </a:ln>
         </p:spPr>
@@ -9197,9 +9209,9 @@
             <a:r>
               <a:rPr sz="1450" b="1">
                 <a:solidFill>
-                  <a:srgbClr val="1E3A8A"/>
-                </a:solidFill>
-                <a:latin typeface="Arial"/>
+                  <a:srgbClr val="388C73"/>
+                </a:solidFill>
+                <a:latin typeface="Aptos Display"/>
               </a:rPr>
               <a:t>Benign nuisance obstacles</a:t>
             </a:r>
@@ -9236,9 +9248,9 @@
             <a:r>
               <a:rPr sz="1180" b="0">
                 <a:solidFill>
-                  <a:srgbClr val="0F172A"/>
-                </a:solidFill>
-                <a:latin typeface="Arial"/>
+                  <a:srgbClr val="05164D"/>
+                </a:solidFill>
+                <a:latin typeface="Aptos"/>
               </a:rPr>
               <a:t>• Loose paper or wrapping material</a:t>
             </a:r>
@@ -9252,9 +9264,9 @@
             <a:r>
               <a:rPr sz="1180" b="0">
                 <a:solidFill>
-                  <a:srgbClr val="0F172A"/>
-                </a:solidFill>
-                <a:latin typeface="Arial"/>
+                  <a:srgbClr val="05164D"/>
+                </a:solidFill>
+                <a:latin typeface="Aptos"/>
               </a:rPr>
               <a:t>• Reflective foil or soft plastic sheet</a:t>
             </a:r>
@@ -9268,9 +9280,9 @@
             <a:r>
               <a:rPr sz="1180" b="0">
                 <a:solidFill>
-                  <a:srgbClr val="0F172A"/>
-                </a:solidFill>
-                <a:latin typeface="Arial"/>
+                  <a:srgbClr val="05164D"/>
+                </a:solidFill>
+                <a:latin typeface="Aptos"/>
               </a:rPr>
               <a:t>• Visually large but low-mass clutter</a:t>
             </a:r>
@@ -9296,7 +9308,7 @@
           </a:solidFill>
           <a:ln w="12700">
             <a:solidFill>
-              <a:srgbClr val="CBD5E1"/>
+              <a:srgbClr val="D9D9D2"/>
             </a:solidFill>
           </a:ln>
         </p:spPr>
@@ -9352,9 +9364,9 @@
             <a:r>
               <a:rPr sz="1450" b="1">
                 <a:solidFill>
-                  <a:srgbClr val="B91C1C"/>
-                </a:solidFill>
-                <a:latin typeface="Arial"/>
+                  <a:srgbClr val="BF0A30"/>
+                </a:solidFill>
+                <a:latin typeface="Aptos Display"/>
               </a:rPr>
               <a:t>High-risk obstacles</a:t>
             </a:r>
@@ -9391,9 +9403,9 @@
             <a:r>
               <a:rPr sz="1180" b="0">
                 <a:solidFill>
-                  <a:srgbClr val="0F172A"/>
-                </a:solidFill>
-                <a:latin typeface="Arial"/>
+                  <a:srgbClr val="05164D"/>
+                </a:solidFill>
+                <a:latin typeface="Aptos"/>
               </a:rPr>
               <a:t>• Dropped pallet or heavy cargo</a:t>
             </a:r>
@@ -9407,9 +9419,9 @@
             <a:r>
               <a:rPr sz="1180" b="0">
                 <a:solidFill>
-                  <a:srgbClr val="0F172A"/>
-                </a:solidFill>
-                <a:latin typeface="Arial"/>
+                  <a:srgbClr val="05164D"/>
+                </a:solidFill>
+                <a:latin typeface="Aptos"/>
               </a:rPr>
               <a:t>• Human worker or moving object</a:t>
             </a:r>
@@ -9423,9 +9435,9 @@
             <a:r>
               <a:rPr sz="1180" b="0">
                 <a:solidFill>
-                  <a:srgbClr val="0F172A"/>
-                </a:solidFill>
-                <a:latin typeface="Arial"/>
+                  <a:srgbClr val="05164D"/>
+                </a:solidFill>
+                <a:latin typeface="Aptos"/>
               </a:rPr>
               <a:t>• Solid equipment blocking the AGV path</a:t>
             </a:r>
@@ -9451,7 +9463,7 @@
           </a:solidFill>
           <a:ln w="12700">
             <a:solidFill>
-              <a:srgbClr val="CBD5E1"/>
+              <a:srgbClr val="D9D9D2"/>
             </a:solidFill>
           </a:ln>
         </p:spPr>
@@ -9507,9 +9519,9 @@
             <a:r>
               <a:rPr sz="1300" b="1">
                 <a:solidFill>
-                  <a:srgbClr val="1E3A8A"/>
-                </a:solidFill>
-                <a:latin typeface="Arial"/>
+                  <a:srgbClr val="05164D"/>
+                </a:solidFill>
+                <a:latin typeface="Aptos Display"/>
               </a:rPr>
               <a:t>Why this matters operationally</a:t>
             </a:r>
@@ -9546,9 +9558,9 @@
             <a:r>
               <a:rPr sz="1320" b="0">
                 <a:solidFill>
-                  <a:srgbClr val="0F172A"/>
-                </a:solidFill>
-                <a:latin typeface="Arial"/>
+                  <a:srgbClr val="05164D"/>
+                </a:solidFill>
+                <a:latin typeface="Aptos"/>
               </a:rPr>
               <a:t>A warehouse operator must decide quickly whether the AGV is blocked by harmless material or by a genuine collision risk. The presentation therefore positions the project as decision support for remote assistance, not as autonomous control.</a:t>
             </a:r>
@@ -9570,7 +9582,7 @@
             <a:avLst/>
           </a:prstGeom>
           <a:solidFill>
-            <a:srgbClr val="CBD5E1"/>
+            <a:srgbClr val="D9D9D2"/>
           </a:solidFill>
           <a:ln>
             <a:noFill/>
@@ -9628,9 +9640,9 @@
             <a:r>
               <a:rPr sz="1080" b="0">
                 <a:solidFill>
-                  <a:srgbClr val="475569"/>
-                </a:solidFill>
-                <a:latin typeface="Arial"/>
+                  <a:srgbClr val="595452"/>
+                </a:solidFill>
+                <a:latin typeface="Aptos"/>
               </a:rPr>
               <a:t>The presentation focuses on a narrow warehouse stop-resolution problem: improving operator review, not replacing the vehicle safety controller.</a:t>
             </a:r>
@@ -9651,7 +9663,7 @@
     <p:bg>
       <p:bgPr>
         <a:solidFill>
-          <a:srgbClr val="F8FAFC"/>
+          <a:srgbClr val="FFFFFF"/>
         </a:solidFill>
         <a:effectLst/>
       </p:bgPr>
@@ -9693,9 +9705,9 @@
             <a:r>
               <a:rPr sz="2400" b="1">
                 <a:solidFill>
-                  <a:srgbClr val="0F172A"/>
-                </a:solidFill>
-                <a:latin typeface="Arial"/>
+                  <a:srgbClr val="05164D"/>
+                </a:solidFill>
+                <a:latin typeface="Aptos Display"/>
               </a:rPr>
               <a:t>Objective, Scope, and Contribution</a:t>
             </a:r>
@@ -9710,17 +9722,19 @@
         </p:nvSpPr>
         <p:spPr>
           <a:xfrm>
-            <a:off x="10287000" y="279400"/>
-            <a:ext cx="1371600" cy="304800"/>
+            <a:off x="10134600" y="279400"/>
+            <a:ext cx="1524000" cy="304800"/>
           </a:xfrm>
           <a:prstGeom prst="roundRect">
             <a:avLst/>
           </a:prstGeom>
           <a:solidFill>
-            <a:srgbClr val="DBEAFE"/>
+            <a:srgbClr val="EEF3FF"/>
           </a:solidFill>
-          <a:ln>
-            <a:noFill/>
+          <a:ln w="10160">
+            <a:solidFill>
+              <a:srgbClr val="5999FF"/>
+            </a:solidFill>
           </a:ln>
         </p:spPr>
         <p:style>
@@ -9753,8 +9767,8 @@
         </p:nvSpPr>
         <p:spPr>
           <a:xfrm>
-            <a:off x="10287000" y="330200"/>
-            <a:ext cx="1371600" cy="228600"/>
+            <a:off x="10134600" y="330200"/>
+            <a:ext cx="1524000" cy="228600"/>
           </a:xfrm>
           <a:prstGeom prst="rect">
             <a:avLst/>
@@ -9775,9 +9789,9 @@
             <a:r>
               <a:rPr sz="950" b="1">
                 <a:solidFill>
-                  <a:srgbClr val="1E3A8A"/>
-                </a:solidFill>
-                <a:latin typeface="Arial"/>
+                  <a:srgbClr val="0C35F2"/>
+                </a:solidFill>
+                <a:latin typeface="Aptos Display"/>
               </a:rPr>
               <a:t>SCOPE</a:t>
             </a:r>
@@ -9799,7 +9813,7 @@
             <a:avLst/>
           </a:prstGeom>
           <a:solidFill>
-            <a:srgbClr val="CBD5E1"/>
+            <a:srgbClr val="D9D9D2"/>
           </a:solidFill>
           <a:ln>
             <a:noFill/>
@@ -9857,9 +9871,9 @@
             <a:r>
               <a:rPr sz="850" b="0">
                 <a:solidFill>
-                  <a:srgbClr val="475569"/>
-                </a:solidFill>
-                <a:latin typeface="Arial"/>
+                  <a:srgbClr val="948E8D"/>
+                </a:solidFill>
+                <a:latin typeface="Aptos"/>
               </a:rPr>
               <a:t>AGV Fleet VLA Intelligence</a:t>
             </a:r>
@@ -9896,9 +9910,9 @@
             <a:r>
               <a:rPr sz="850" b="0">
                 <a:solidFill>
-                  <a:srgbClr val="475569"/>
-                </a:solidFill>
-                <a:latin typeface="Arial"/>
+                  <a:srgbClr val="948E8D"/>
+                </a:solidFill>
+                <a:latin typeface="Aptos"/>
               </a:rPr>
               <a:t>3/13</a:t>
             </a:r>
@@ -9920,11 +9934,11 @@
             <a:avLst/>
           </a:prstGeom>
           <a:solidFill>
-            <a:srgbClr val="EFF6FF"/>
+            <a:srgbClr val="EEF3FF"/>
           </a:solidFill>
           <a:ln w="12700">
             <a:solidFill>
-              <a:srgbClr val="CBD5E1"/>
+              <a:srgbClr val="D9D9D2"/>
             </a:solidFill>
           </a:ln>
         </p:spPr>
@@ -9980,9 +9994,9 @@
             <a:r>
               <a:rPr sz="1300" b="1">
                 <a:solidFill>
-                  <a:srgbClr val="1E3A8A"/>
-                </a:solidFill>
-                <a:latin typeface="Arial"/>
+                  <a:srgbClr val="05164D"/>
+                </a:solidFill>
+                <a:latin typeface="Aptos Display"/>
               </a:rPr>
               <a:t>Objective</a:t>
             </a:r>
@@ -10019,9 +10033,9 @@
             <a:r>
               <a:rPr sz="1320" b="0">
                 <a:solidFill>
-                  <a:srgbClr val="0F172A"/>
-                </a:solidFill>
-                <a:latin typeface="Arial"/>
+                  <a:srgbClr val="05164D"/>
+                </a:solidFill>
+                <a:latin typeface="Aptos"/>
               </a:rPr>
               <a:t>Build a multimodal decision-support dashboard that helps an operator review AGV stop events using media, telemetry, and recent incident history.</a:t>
             </a:r>
@@ -10047,7 +10061,7 @@
           </a:solidFill>
           <a:ln w="12700">
             <a:solidFill>
-              <a:srgbClr val="CBD5E1"/>
+              <a:srgbClr val="D9D9D2"/>
             </a:solidFill>
           </a:ln>
         </p:spPr>
@@ -10103,9 +10117,9 @@
             <a:r>
               <a:rPr sz="1500" b="1">
                 <a:solidFill>
-                  <a:srgbClr val="15803D"/>
-                </a:solidFill>
-                <a:latin typeface="Arial"/>
+                  <a:srgbClr val="388C73"/>
+                </a:solidFill>
+                <a:latin typeface="Aptos Display"/>
               </a:rPr>
               <a:t>In Scope</a:t>
             </a:r>
@@ -10142,9 +10156,9 @@
             <a:r>
               <a:rPr sz="1220" b="0">
                 <a:solidFill>
-                  <a:srgbClr val="0F172A"/>
-                </a:solidFill>
-                <a:latin typeface="Arial"/>
+                  <a:srgbClr val="05164D"/>
+                </a:solidFill>
+                <a:latin typeface="Aptos"/>
               </a:rPr>
               <a:t>• Operator-facing advisory dashboard</a:t>
             </a:r>
@@ -10158,9 +10172,9 @@
             <a:r>
               <a:rPr sz="1220" b="0">
                 <a:solidFill>
-                  <a:srgbClr val="0F172A"/>
-                </a:solidFill>
-                <a:latin typeface="Arial"/>
+                  <a:srgbClr val="05164D"/>
+                </a:solidFill>
+                <a:latin typeface="Aptos"/>
               </a:rPr>
               <a:t>• Schema-constrained multimodal reasoning</a:t>
             </a:r>
@@ -10174,9 +10188,9 @@
             <a:r>
               <a:rPr sz="1220" b="0">
                 <a:solidFill>
-                  <a:srgbClr val="0F172A"/>
-                </a:solidFill>
-                <a:latin typeface="Arial"/>
+                  <a:srgbClr val="05164D"/>
+                </a:solidFill>
+                <a:latin typeface="Aptos"/>
               </a:rPr>
               <a:t>• Incident persistence and traceability</a:t>
             </a:r>
@@ -10190,9 +10204,9 @@
             <a:r>
               <a:rPr sz="1220" b="0">
                 <a:solidFill>
-                  <a:srgbClr val="0F172A"/>
-                </a:solidFill>
-                <a:latin typeface="Arial"/>
+                  <a:srgbClr val="05164D"/>
+                </a:solidFill>
+                <a:latin typeface="Aptos"/>
               </a:rPr>
               <a:t>• Prototype-level evaluation and audit tooling</a:t>
             </a:r>
@@ -10218,7 +10232,7 @@
           </a:solidFill>
           <a:ln w="12700">
             <a:solidFill>
-              <a:srgbClr val="CBD5E1"/>
+              <a:srgbClr val="D9D9D2"/>
             </a:solidFill>
           </a:ln>
         </p:spPr>
@@ -10274,9 +10288,9 @@
             <a:r>
               <a:rPr sz="1500" b="1">
                 <a:solidFill>
-                  <a:srgbClr val="B91C1C"/>
-                </a:solidFill>
-                <a:latin typeface="Arial"/>
+                  <a:srgbClr val="BF0A30"/>
+                </a:solidFill>
+                <a:latin typeface="Aptos Display"/>
               </a:rPr>
               <a:t>Out of Scope</a:t>
             </a:r>
@@ -10313,9 +10327,9 @@
             <a:r>
               <a:rPr sz="1220" b="0">
                 <a:solidFill>
-                  <a:srgbClr val="0F172A"/>
-                </a:solidFill>
-                <a:latin typeface="Arial"/>
+                  <a:srgbClr val="05164D"/>
+                </a:solidFill>
+                <a:latin typeface="Aptos"/>
               </a:rPr>
               <a:t>• Autonomous actuation or motion control</a:t>
             </a:r>
@@ -10329,9 +10343,9 @@
             <a:r>
               <a:rPr sz="1220" b="0">
                 <a:solidFill>
-                  <a:srgbClr val="0F172A"/>
-                </a:solidFill>
-                <a:latin typeface="Arial"/>
+                  <a:srgbClr val="05164D"/>
+                </a:solidFill>
+                <a:latin typeface="Aptos"/>
               </a:rPr>
               <a:t>• Live fleet integration or teleoperation</a:t>
             </a:r>
@@ -10345,9 +10359,9 @@
             <a:r>
               <a:rPr sz="1220" b="0">
                 <a:solidFill>
-                  <a:srgbClr val="0F172A"/>
-                </a:solidFill>
-                <a:latin typeface="Arial"/>
+                  <a:srgbClr val="05164D"/>
+                </a:solidFill>
+                <a:latin typeface="Aptos"/>
               </a:rPr>
               <a:t>• Industrial deployment readiness claims</a:t>
             </a:r>
@@ -10361,9 +10375,9 @@
             <a:r>
               <a:rPr sz="1220" b="0">
                 <a:solidFill>
-                  <a:srgbClr val="0F172A"/>
-                </a:solidFill>
-                <a:latin typeface="Arial"/>
+                  <a:srgbClr val="05164D"/>
+                </a:solidFill>
+                <a:latin typeface="Aptos"/>
               </a:rPr>
               <a:t>• Large-scale validated benchmark claims</a:t>
             </a:r>
@@ -10389,7 +10403,7 @@
           </a:solidFill>
           <a:ln w="12700">
             <a:solidFill>
-              <a:srgbClr val="CBD5E1"/>
+              <a:srgbClr val="D9D9D2"/>
             </a:solidFill>
           </a:ln>
         </p:spPr>
@@ -10445,9 +10459,9 @@
             <a:r>
               <a:rPr sz="1340" b="1">
                 <a:solidFill>
-                  <a:srgbClr val="0F172A"/>
-                </a:solidFill>
-                <a:latin typeface="Arial"/>
+                  <a:srgbClr val="05164D"/>
+                </a:solidFill>
+                <a:latin typeface="Aptos Display"/>
               </a:rPr>
               <a:t>Implemented multimodal advisory prototype</a:t>
             </a:r>
@@ -10473,7 +10487,7 @@
           </a:solidFill>
           <a:ln w="12700">
             <a:solidFill>
-              <a:srgbClr val="CBD5E1"/>
+              <a:srgbClr val="D9D9D2"/>
             </a:solidFill>
           </a:ln>
         </p:spPr>
@@ -10529,9 +10543,9 @@
             <a:r>
               <a:rPr sz="1340" b="1">
                 <a:solidFill>
-                  <a:srgbClr val="0F172A"/>
-                </a:solidFill>
-                <a:latin typeface="Arial"/>
+                  <a:srgbClr val="05164D"/>
+                </a:solidFill>
+                <a:latin typeface="Aptos Display"/>
               </a:rPr>
               <a:t>Structured operator workflow and persistence layer</a:t>
             </a:r>
@@ -10557,7 +10571,7 @@
           </a:solidFill>
           <a:ln w="12700">
             <a:solidFill>
-              <a:srgbClr val="CBD5E1"/>
+              <a:srgbClr val="D9D9D2"/>
             </a:solidFill>
           </a:ln>
         </p:spPr>
@@ -10613,9 +10627,9 @@
             <a:r>
               <a:rPr sz="1340" b="1">
                 <a:solidFill>
-                  <a:srgbClr val="0F172A"/>
-                </a:solidFill>
-                <a:latin typeface="Arial"/>
+                  <a:srgbClr val="05164D"/>
+                </a:solidFill>
+                <a:latin typeface="Aptos Display"/>
               </a:rPr>
               <a:t>Conservative evaluation and CSV-backed audit framework</a:t>
             </a:r>
@@ -10636,7 +10650,7 @@
     <p:bg>
       <p:bgPr>
         <a:solidFill>
-          <a:srgbClr val="F8FAFC"/>
+          <a:srgbClr val="FFFFFF"/>
         </a:solidFill>
         <a:effectLst/>
       </p:bgPr>
@@ -10678,9 +10692,9 @@
             <a:r>
               <a:rPr sz="2400" b="1">
                 <a:solidFill>
-                  <a:srgbClr val="0F172A"/>
-                </a:solidFill>
-                <a:latin typeface="Arial"/>
+                  <a:srgbClr val="05164D"/>
+                </a:solidFill>
+                <a:latin typeface="Aptos Display"/>
               </a:rPr>
               <a:t>System Architecture</a:t>
             </a:r>
@@ -10695,17 +10709,19 @@
         </p:nvSpPr>
         <p:spPr>
           <a:xfrm>
-            <a:off x="10287000" y="279400"/>
-            <a:ext cx="1371600" cy="304800"/>
+            <a:off x="10134600" y="279400"/>
+            <a:ext cx="1524000" cy="304800"/>
           </a:xfrm>
           <a:prstGeom prst="roundRect">
             <a:avLst/>
           </a:prstGeom>
           <a:solidFill>
-            <a:srgbClr val="DBEAFE"/>
+            <a:srgbClr val="EEF3FF"/>
           </a:solidFill>
-          <a:ln>
-            <a:noFill/>
+          <a:ln w="10160">
+            <a:solidFill>
+              <a:srgbClr val="5999FF"/>
+            </a:solidFill>
           </a:ln>
         </p:spPr>
         <p:style>
@@ -10738,8 +10754,8 @@
         </p:nvSpPr>
         <p:spPr>
           <a:xfrm>
-            <a:off x="10287000" y="330200"/>
-            <a:ext cx="1371600" cy="228600"/>
+            <a:off x="10134600" y="330200"/>
+            <a:ext cx="1524000" cy="228600"/>
           </a:xfrm>
           <a:prstGeom prst="rect">
             <a:avLst/>
@@ -10760,9 +10776,9 @@
             <a:r>
               <a:rPr sz="950" b="1">
                 <a:solidFill>
-                  <a:srgbClr val="1E3A8A"/>
-                </a:solidFill>
-                <a:latin typeface="Arial"/>
+                  <a:srgbClr val="0C35F2"/>
+                </a:solidFill>
+                <a:latin typeface="Aptos Display"/>
               </a:rPr>
               <a:t>SYSTEM</a:t>
             </a:r>
@@ -10784,7 +10800,7 @@
             <a:avLst/>
           </a:prstGeom>
           <a:solidFill>
-            <a:srgbClr val="CBD5E1"/>
+            <a:srgbClr val="D9D9D2"/>
           </a:solidFill>
           <a:ln>
             <a:noFill/>
@@ -10842,9 +10858,9 @@
             <a:r>
               <a:rPr sz="850" b="0">
                 <a:solidFill>
-                  <a:srgbClr val="475569"/>
-                </a:solidFill>
-                <a:latin typeface="Arial"/>
+                  <a:srgbClr val="948E8D"/>
+                </a:solidFill>
+                <a:latin typeface="Aptos"/>
               </a:rPr>
               <a:t>AGV Fleet VLA Intelligence</a:t>
             </a:r>
@@ -10881,9 +10897,9 @@
             <a:r>
               <a:rPr sz="850" b="0">
                 <a:solidFill>
-                  <a:srgbClr val="475569"/>
-                </a:solidFill>
-                <a:latin typeface="Arial"/>
+                  <a:srgbClr val="948E8D"/>
+                </a:solidFill>
+                <a:latin typeface="Aptos"/>
               </a:rPr>
               <a:t>4/13</a:t>
             </a:r>
@@ -10909,7 +10925,7 @@
           </a:solidFill>
           <a:ln w="12700">
             <a:solidFill>
-              <a:srgbClr val="CBD5E1"/>
+              <a:srgbClr val="D9D9D2"/>
             </a:solidFill>
           </a:ln>
         </p:spPr>
@@ -10965,9 +10981,9 @@
             <a:r>
               <a:rPr sz="1260" b="0">
                 <a:solidFill>
-                  <a:srgbClr val="0F172A"/>
-                </a:solidFill>
-                <a:latin typeface="Arial"/>
+                  <a:srgbClr val="05164D"/>
+                </a:solidFill>
+                <a:latin typeface="Aptos"/>
               </a:rPr>
               <a:t>• Inputs: image or video frame, optional audio, typed telemetry, and recent incident summaries.</a:t>
             </a:r>
@@ -10981,9 +10997,9 @@
             <a:r>
               <a:rPr sz="1260" b="0">
                 <a:solidFill>
-                  <a:srgbClr val="0F172A"/>
-                </a:solidFill>
-                <a:latin typeface="Arial"/>
+                  <a:srgbClr val="05164D"/>
+                </a:solidFill>
+                <a:latin typeface="Aptos"/>
               </a:rPr>
               <a:t>• Processing: Gemini multimodal analysis with a constrained JSON response contract.</a:t>
             </a:r>
@@ -10997,9 +11013,9 @@
             <a:r>
               <a:rPr sz="1260" b="0">
                 <a:solidFill>
-                  <a:srgbClr val="0F172A"/>
-                </a:solidFill>
-                <a:latin typeface="Arial"/>
+                  <a:srgbClr val="05164D"/>
+                </a:solidFill>
+                <a:latin typeface="Aptos"/>
               </a:rPr>
               <a:t>• Outputs: danger score, recommended action, commentary, and UI trigger state.</a:t>
             </a:r>
@@ -11013,9 +11029,9 @@
             <a:r>
               <a:rPr sz="1260" b="0">
                 <a:solidFill>
-                  <a:srgbClr val="0F172A"/>
-                </a:solidFill>
-                <a:latin typeface="Arial"/>
+                  <a:srgbClr val="05164D"/>
+                </a:solidFill>
+                <a:latin typeface="Aptos"/>
               </a:rPr>
               <a:t>• Persistence: Firestore stores both model output and operator decision for later audit and reuse.</a:t>
             </a:r>
@@ -11041,7 +11057,7 @@
           </a:solidFill>
           <a:ln w="12700">
             <a:solidFill>
-              <a:srgbClr val="CBD5E1"/>
+              <a:srgbClr val="D9D9D2"/>
             </a:solidFill>
           </a:ln>
         </p:spPr>
@@ -11121,9 +11137,9 @@
             <a:r>
               <a:rPr sz="1050" b="0">
                 <a:solidFill>
-                  <a:srgbClr val="475569"/>
-                </a:solidFill>
-                <a:latin typeface="Arial"/>
+                  <a:srgbClr val="595452"/>
+                </a:solidFill>
+                <a:latin typeface="Aptos"/>
               </a:rPr>
               <a:t>Functional diagram of the advisory pipeline from multimodal inputs to operator-facing recommendation and persistence.</a:t>
             </a:r>
@@ -11144,7 +11160,7 @@
     <p:bg>
       <p:bgPr>
         <a:solidFill>
-          <a:srgbClr val="F8FAFC"/>
+          <a:srgbClr val="FFFFFF"/>
         </a:solidFill>
         <a:effectLst/>
       </p:bgPr>
@@ -11186,9 +11202,9 @@
             <a:r>
               <a:rPr sz="2400" b="1">
                 <a:solidFill>
-                  <a:srgbClr val="0F172A"/>
-                </a:solidFill>
-                <a:latin typeface="Arial"/>
+                  <a:srgbClr val="05164D"/>
+                </a:solidFill>
+                <a:latin typeface="Aptos Display"/>
               </a:rPr>
               <a:t>Prototype Workflow</a:t>
             </a:r>
@@ -11203,17 +11219,19 @@
         </p:nvSpPr>
         <p:spPr>
           <a:xfrm>
-            <a:off x="10287000" y="279400"/>
-            <a:ext cx="1371600" cy="304800"/>
+            <a:off x="10134600" y="279400"/>
+            <a:ext cx="1524000" cy="304800"/>
           </a:xfrm>
           <a:prstGeom prst="roundRect">
             <a:avLst/>
           </a:prstGeom>
           <a:solidFill>
-            <a:srgbClr val="DBEAFE"/>
+            <a:srgbClr val="EEF3FF"/>
           </a:solidFill>
-          <a:ln>
-            <a:noFill/>
+          <a:ln w="10160">
+            <a:solidFill>
+              <a:srgbClr val="5999FF"/>
+            </a:solidFill>
           </a:ln>
         </p:spPr>
         <p:style>
@@ -11246,8 +11264,8 @@
         </p:nvSpPr>
         <p:spPr>
           <a:xfrm>
-            <a:off x="10287000" y="330200"/>
-            <a:ext cx="1371600" cy="228600"/>
+            <a:off x="10134600" y="330200"/>
+            <a:ext cx="1524000" cy="228600"/>
           </a:xfrm>
           <a:prstGeom prst="rect">
             <a:avLst/>
@@ -11268,9 +11286,9 @@
             <a:r>
               <a:rPr sz="950" b="1">
                 <a:solidFill>
-                  <a:srgbClr val="1E3A8A"/>
-                </a:solidFill>
-                <a:latin typeface="Arial"/>
+                  <a:srgbClr val="0C35F2"/>
+                </a:solidFill>
+                <a:latin typeface="Aptos Display"/>
               </a:rPr>
               <a:t>WORKFLOW</a:t>
             </a:r>
@@ -11292,7 +11310,7 @@
             <a:avLst/>
           </a:prstGeom>
           <a:solidFill>
-            <a:srgbClr val="CBD5E1"/>
+            <a:srgbClr val="D9D9D2"/>
           </a:solidFill>
           <a:ln>
             <a:noFill/>
@@ -11350,9 +11368,9 @@
             <a:r>
               <a:rPr sz="850" b="0">
                 <a:solidFill>
-                  <a:srgbClr val="475569"/>
-                </a:solidFill>
-                <a:latin typeface="Arial"/>
+                  <a:srgbClr val="948E8D"/>
+                </a:solidFill>
+                <a:latin typeface="Aptos"/>
               </a:rPr>
               <a:t>AGV Fleet VLA Intelligence</a:t>
             </a:r>
@@ -11389,9 +11407,9 @@
             <a:r>
               <a:rPr sz="850" b="0">
                 <a:solidFill>
-                  <a:srgbClr val="475569"/>
-                </a:solidFill>
-                <a:latin typeface="Arial"/>
+                  <a:srgbClr val="948E8D"/>
+                </a:solidFill>
+                <a:latin typeface="Aptos"/>
               </a:rPr>
               <a:t>5/13</a:t>
             </a:r>
@@ -11417,7 +11435,7 @@
           </a:solidFill>
           <a:ln w="12700">
             <a:solidFill>
-              <a:srgbClr val="CBD5E1"/>
+              <a:srgbClr val="D9D9D2"/>
             </a:solidFill>
           </a:ln>
         </p:spPr>
@@ -11458,11 +11476,11 @@
             <a:avLst/>
           </a:prstGeom>
           <a:solidFill>
-            <a:srgbClr val="EFF6FF"/>
+            <a:srgbClr val="EEF3FF"/>
           </a:solidFill>
           <a:ln w="12700">
             <a:solidFill>
-              <a:srgbClr val="CBD5E1"/>
+              <a:srgbClr val="D9D9D2"/>
             </a:solidFill>
           </a:ln>
         </p:spPr>
@@ -11542,9 +11560,9 @@
             <a:r>
               <a:rPr sz="1400" b="1">
                 <a:solidFill>
-                  <a:srgbClr val="1E3A8A"/>
-                </a:solidFill>
-                <a:latin typeface="Arial"/>
+                  <a:srgbClr val="05164D"/>
+                </a:solidFill>
+                <a:latin typeface="Aptos Display"/>
               </a:rPr>
               <a:t>1. Capture</a:t>
             </a:r>
@@ -11581,9 +11599,9 @@
             <a:r>
               <a:rPr sz="1080" b="0">
                 <a:solidFill>
-                  <a:srgbClr val="0F172A"/>
-                </a:solidFill>
-                <a:latin typeface="Arial"/>
+                  <a:srgbClr val="05164D"/>
+                </a:solidFill>
+                <a:latin typeface="Aptos"/>
               </a:rPr>
               <a:t>Operator provides incident media and typed telemetry in the prototype UI.</a:t>
             </a:r>
@@ -11609,7 +11627,7 @@
           </a:solidFill>
           <a:ln w="12700">
             <a:solidFill>
-              <a:srgbClr val="CBD5E1"/>
+              <a:srgbClr val="D9D9D2"/>
             </a:solidFill>
           </a:ln>
         </p:spPr>
@@ -11650,11 +11668,11 @@
             <a:avLst/>
           </a:prstGeom>
           <a:solidFill>
-            <a:srgbClr val="EFF6FF"/>
+            <a:srgbClr val="EEF3FF"/>
           </a:solidFill>
           <a:ln w="12700">
             <a:solidFill>
-              <a:srgbClr val="CBD5E1"/>
+              <a:srgbClr val="D9D9D2"/>
             </a:solidFill>
           </a:ln>
         </p:spPr>
@@ -11734,9 +11752,9 @@
             <a:r>
               <a:rPr sz="1400" b="1">
                 <a:solidFill>
-                  <a:srgbClr val="1E3A8A"/>
-                </a:solidFill>
-                <a:latin typeface="Arial"/>
+                  <a:srgbClr val="05164D"/>
+                </a:solidFill>
+                <a:latin typeface="Aptos Display"/>
               </a:rPr>
               <a:t>2. Analyze</a:t>
             </a:r>
@@ -11773,9 +11791,9 @@
             <a:r>
               <a:rPr sz="1080" b="0">
                 <a:solidFill>
-                  <a:srgbClr val="0F172A"/>
-                </a:solidFill>
-                <a:latin typeface="Arial"/>
+                  <a:srgbClr val="05164D"/>
+                </a:solidFill>
+                <a:latin typeface="Aptos"/>
               </a:rPr>
               <a:t>The advisory engine returns status, score, and recommended operator action.</a:t>
             </a:r>
@@ -11801,7 +11819,7 @@
           </a:solidFill>
           <a:ln w="12700">
             <a:solidFill>
-              <a:srgbClr val="CBD5E1"/>
+              <a:srgbClr val="D9D9D2"/>
             </a:solidFill>
           </a:ln>
         </p:spPr>
@@ -11842,11 +11860,11 @@
             <a:avLst/>
           </a:prstGeom>
           <a:solidFill>
-            <a:srgbClr val="EFF6FF"/>
+            <a:srgbClr val="EEF3FF"/>
           </a:solidFill>
           <a:ln w="12700">
             <a:solidFill>
-              <a:srgbClr val="CBD5E1"/>
+              <a:srgbClr val="D9D9D2"/>
             </a:solidFill>
           </a:ln>
         </p:spPr>
@@ -11926,9 +11944,9 @@
             <a:r>
               <a:rPr sz="1400" b="1">
                 <a:solidFill>
-                  <a:srgbClr val="1E3A8A"/>
-                </a:solidFill>
-                <a:latin typeface="Arial"/>
+                  <a:srgbClr val="05164D"/>
+                </a:solidFill>
+                <a:latin typeface="Aptos Display"/>
               </a:rPr>
               <a:t>3. Decide</a:t>
             </a:r>
@@ -11965,9 +11983,9 @@
             <a:r>
               <a:rPr sz="1080" b="0">
                 <a:solidFill>
-                  <a:srgbClr val="0F172A"/>
-                </a:solidFill>
-                <a:latin typeface="Arial"/>
+                  <a:srgbClr val="05164D"/>
+                </a:solidFill>
+                <a:latin typeface="Aptos"/>
               </a:rPr>
               <a:t>The operator confirms the stop or forces an override; the final action is logged.</a:t>
             </a:r>
@@ -11989,11 +12007,11 @@
             <a:avLst/>
           </a:prstGeom>
           <a:solidFill>
-            <a:srgbClr val="EFF6FF"/>
+            <a:srgbClr val="EEF3FF"/>
           </a:solidFill>
           <a:ln w="12700">
             <a:solidFill>
-              <a:srgbClr val="CBD5E1"/>
+              <a:srgbClr val="D9D9D2"/>
             </a:solidFill>
           </a:ln>
         </p:spPr>
@@ -12049,9 +12067,9 @@
             <a:r>
               <a:rPr sz="1220" b="1">
                 <a:solidFill>
-                  <a:srgbClr val="1E3A8A"/>
-                </a:solidFill>
-                <a:latin typeface="Arial"/>
+                  <a:srgbClr val="05164D"/>
+                </a:solidFill>
+                <a:latin typeface="Aptos Display"/>
               </a:rPr>
               <a:t>The implemented workflow remains human-in-the-loop at the final decision point.</a:t>
             </a:r>
@@ -12072,7 +12090,7 @@
     <p:bg>
       <p:bgPr>
         <a:solidFill>
-          <a:srgbClr val="F8FAFC"/>
+          <a:srgbClr val="FFFFFF"/>
         </a:solidFill>
         <a:effectLst/>
       </p:bgPr>
@@ -12114,9 +12132,9 @@
             <a:r>
               <a:rPr sz="2400" b="1">
                 <a:solidFill>
-                  <a:srgbClr val="0F172A"/>
-                </a:solidFill>
-                <a:latin typeface="Arial"/>
+                  <a:srgbClr val="05164D"/>
+                </a:solidFill>
+                <a:latin typeface="Aptos Display"/>
               </a:rPr>
               <a:t>Model Contract and Decision Taxonomy</a:t>
             </a:r>
@@ -12131,17 +12149,19 @@
         </p:nvSpPr>
         <p:spPr>
           <a:xfrm>
-            <a:off x="10287000" y="279400"/>
-            <a:ext cx="1371600" cy="304800"/>
+            <a:off x="10134600" y="279400"/>
+            <a:ext cx="1524000" cy="304800"/>
           </a:xfrm>
           <a:prstGeom prst="roundRect">
             <a:avLst/>
           </a:prstGeom>
           <a:solidFill>
-            <a:srgbClr val="DBEAFE"/>
+            <a:srgbClr val="EEF3FF"/>
           </a:solidFill>
-          <a:ln>
-            <a:noFill/>
+          <a:ln w="10160">
+            <a:solidFill>
+              <a:srgbClr val="5999FF"/>
+            </a:solidFill>
           </a:ln>
         </p:spPr>
         <p:style>
@@ -12174,8 +12194,8 @@
         </p:nvSpPr>
         <p:spPr>
           <a:xfrm>
-            <a:off x="10287000" y="330200"/>
-            <a:ext cx="1371600" cy="228600"/>
+            <a:off x="10134600" y="330200"/>
+            <a:ext cx="1524000" cy="228600"/>
           </a:xfrm>
           <a:prstGeom prst="rect">
             <a:avLst/>
@@ -12196,9 +12216,9 @@
             <a:r>
               <a:rPr sz="950" b="1">
                 <a:solidFill>
-                  <a:srgbClr val="1E3A8A"/>
-                </a:solidFill>
-                <a:latin typeface="Arial"/>
+                  <a:srgbClr val="0C35F2"/>
+                </a:solidFill>
+                <a:latin typeface="Aptos Display"/>
               </a:rPr>
               <a:t>REASONING</a:t>
             </a:r>
@@ -12220,7 +12240,7 @@
             <a:avLst/>
           </a:prstGeom>
           <a:solidFill>
-            <a:srgbClr val="CBD5E1"/>
+            <a:srgbClr val="D9D9D2"/>
           </a:solidFill>
           <a:ln>
             <a:noFill/>
@@ -12278,9 +12298,9 @@
             <a:r>
               <a:rPr sz="850" b="0">
                 <a:solidFill>
-                  <a:srgbClr val="475569"/>
-                </a:solidFill>
-                <a:latin typeface="Arial"/>
+                  <a:srgbClr val="948E8D"/>
+                </a:solidFill>
+                <a:latin typeface="Aptos"/>
               </a:rPr>
               <a:t>AGV Fleet VLA Intelligence</a:t>
             </a:r>
@@ -12317,9 +12337,9 @@
             <a:r>
               <a:rPr sz="850" b="0">
                 <a:solidFill>
-                  <a:srgbClr val="475569"/>
-                </a:solidFill>
-                <a:latin typeface="Arial"/>
+                  <a:srgbClr val="948E8D"/>
+                </a:solidFill>
+                <a:latin typeface="Aptos"/>
               </a:rPr>
               <a:t>6/13</a:t>
             </a:r>
@@ -12345,7 +12365,7 @@
           </a:solidFill>
           <a:ln w="12700">
             <a:solidFill>
-              <a:srgbClr val="CBD5E1"/>
+              <a:srgbClr val="D9D9D2"/>
             </a:solidFill>
           </a:ln>
         </p:spPr>
@@ -12414,7 +12434,7 @@
           </a:solidFill>
           <a:ln w="12700">
             <a:solidFill>
-              <a:srgbClr val="CBD5E1"/>
+              <a:srgbClr val="D9D9D2"/>
             </a:solidFill>
           </a:ln>
         </p:spPr>
@@ -12470,9 +12490,9 @@
             <a:r>
               <a:rPr sz="1420" b="1">
                 <a:solidFill>
-                  <a:srgbClr val="1E3A8A"/>
-                </a:solidFill>
-                <a:latin typeface="Arial"/>
+                  <a:srgbClr val="05164D"/>
+                </a:solidFill>
+                <a:latin typeface="Aptos Display"/>
               </a:rPr>
               <a:t>Model configuration</a:t>
             </a:r>
@@ -12509,9 +12529,9 @@
             <a:r>
               <a:rPr sz="1080" b="0">
                 <a:solidFill>
-                  <a:srgbClr val="0F172A"/>
-                </a:solidFill>
-                <a:latin typeface="Arial"/>
+                  <a:srgbClr val="05164D"/>
+                </a:solidFill>
+                <a:latin typeface="Aptos"/>
               </a:rPr>
               <a:t>• Main advisory model: gemini-3-flash-preview</a:t>
             </a:r>
@@ -12525,9 +12545,9 @@
             <a:r>
               <a:rPr sz="1080" b="0">
                 <a:solidFill>
-                  <a:srgbClr val="0F172A"/>
-                </a:solidFill>
-                <a:latin typeface="Arial"/>
+                  <a:srgbClr val="05164D"/>
+                </a:solidFill>
+                <a:latin typeface="Aptos"/>
               </a:rPr>
               <a:t>• Deterministic decoding: temperature = 0.0</a:t>
             </a:r>
@@ -12541,9 +12561,9 @@
             <a:r>
               <a:rPr sz="1080" b="0">
                 <a:solidFill>
-                  <a:srgbClr val="0F172A"/>
-                </a:solidFill>
-                <a:latin typeface="Arial"/>
+                  <a:srgbClr val="05164D"/>
+                </a:solidFill>
+                <a:latin typeface="Aptos"/>
               </a:rPr>
               <a:t>• Response format: application/json</a:t>
             </a:r>
@@ -12557,9 +12577,9 @@
             <a:r>
               <a:rPr sz="1080" b="0">
                 <a:solidFill>
-                  <a:srgbClr val="0F172A"/>
-                </a:solidFill>
-                <a:latin typeface="Arial"/>
+                  <a:srgbClr val="05164D"/>
+                </a:solidFill>
+                <a:latin typeface="Aptos"/>
               </a:rPr>
               <a:t>• Prompt includes multimodal evidence and recent incident context</a:t>
             </a:r>
@@ -12581,11 +12601,11 @@
             <a:avLst/>
           </a:prstGeom>
           <a:solidFill>
-            <a:srgbClr val="EFF6FF"/>
+            <a:srgbClr val="EEF3FF"/>
           </a:solidFill>
           <a:ln w="12700">
             <a:solidFill>
-              <a:srgbClr val="CBD5E1"/>
+              <a:srgbClr val="D9D9D2"/>
             </a:solidFill>
           </a:ln>
         </p:spPr>
@@ -12641,9 +12661,9 @@
             <a:r>
               <a:rPr sz="1260" b="1">
                 <a:solidFill>
-                  <a:srgbClr val="0F172A"/>
-                </a:solidFill>
-                <a:latin typeface="Arial"/>
+                  <a:srgbClr val="05164D"/>
+                </a:solidFill>
+                <a:latin typeface="Aptos Display"/>
               </a:rPr>
               <a:t>perception_engine</a:t>
             </a:r>
@@ -12665,11 +12685,11 @@
             <a:avLst/>
           </a:prstGeom>
           <a:solidFill>
-            <a:srgbClr val="EFF6FF"/>
+            <a:srgbClr val="EEF3FF"/>
           </a:solidFill>
           <a:ln w="12700">
             <a:solidFill>
-              <a:srgbClr val="CBD5E1"/>
+              <a:srgbClr val="D9D9D2"/>
             </a:solidFill>
           </a:ln>
         </p:spPr>
@@ -12725,9 +12745,9 @@
             <a:r>
               <a:rPr sz="1260" b="1">
                 <a:solidFill>
-                  <a:srgbClr val="0F172A"/>
-                </a:solidFill>
-                <a:latin typeface="Arial"/>
+                  <a:srgbClr val="05164D"/>
+                </a:solidFill>
+                <a:latin typeface="Aptos Display"/>
               </a:rPr>
               <a:t>reasoning_and_commentary</a:t>
             </a:r>
@@ -12749,11 +12769,11 @@
             <a:avLst/>
           </a:prstGeom>
           <a:solidFill>
-            <a:srgbClr val="EFF6FF"/>
+            <a:srgbClr val="EEF3FF"/>
           </a:solidFill>
           <a:ln w="12700">
             <a:solidFill>
-              <a:srgbClr val="CBD5E1"/>
+              <a:srgbClr val="D9D9D2"/>
             </a:solidFill>
           </a:ln>
         </p:spPr>
@@ -12809,9 +12829,9 @@
             <a:r>
               <a:rPr sz="1260" b="1">
                 <a:solidFill>
-                  <a:srgbClr val="0F172A"/>
-                </a:solidFill>
-                <a:latin typeface="Arial"/>
+                  <a:srgbClr val="05164D"/>
+                </a:solidFill>
+                <a:latin typeface="Aptos Display"/>
               </a:rPr>
               <a:t>action_policy</a:t>
             </a:r>
@@ -12833,11 +12853,11 @@
             <a:avLst/>
           </a:prstGeom>
           <a:solidFill>
-            <a:srgbClr val="EFF6FF"/>
+            <a:srgbClr val="EEF3FF"/>
           </a:solidFill>
           <a:ln w="12700">
             <a:solidFill>
-              <a:srgbClr val="CBD5E1"/>
+              <a:srgbClr val="D9D9D2"/>
             </a:solidFill>
           </a:ln>
         </p:spPr>
@@ -12893,9 +12913,9 @@
             <a:r>
               <a:rPr sz="1260" b="1">
                 <a:solidFill>
-                  <a:srgbClr val="0F172A"/>
-                </a:solidFill>
-                <a:latin typeface="Arial"/>
+                  <a:srgbClr val="05164D"/>
+                </a:solidFill>
+                <a:latin typeface="Aptos Display"/>
               </a:rPr>
               <a:t>ui_triggers</a:t>
             </a:r>
@@ -12921,7 +12941,7 @@
           </a:solidFill>
           <a:ln w="12700">
             <a:solidFill>
-              <a:srgbClr val="CBD5E1"/>
+              <a:srgbClr val="D9D9D2"/>
             </a:solidFill>
           </a:ln>
         </p:spPr>
@@ -12977,9 +12997,9 @@
             <a:r>
               <a:rPr sz="1300" b="1">
                 <a:solidFill>
-                  <a:srgbClr val="1E3A8A"/>
-                </a:solidFill>
-                <a:latin typeface="Arial"/>
+                  <a:srgbClr val="05164D"/>
+                </a:solidFill>
+                <a:latin typeface="Aptos Display"/>
               </a:rPr>
               <a:t>Danger-score mapping</a:t>
             </a:r>
@@ -13001,7 +13021,7 @@
             <a:avLst/>
           </a:prstGeom>
           <a:solidFill>
-            <a:srgbClr val="DCFCE7"/>
+            <a:srgbClr val="E7F1ED"/>
           </a:solidFill>
           <a:ln>
             <a:noFill/>
@@ -13059,9 +13079,9 @@
             <a:r>
               <a:rPr sz="1200" b="1">
                 <a:solidFill>
-                  <a:srgbClr val="15803D"/>
-                </a:solidFill>
-                <a:latin typeface="Arial"/>
+                  <a:srgbClr val="388C73"/>
+                </a:solidFill>
+                <a:latin typeface="Aptos Display"/>
               </a:rPr>
               <a:t>Scores 1-2: Safe to Override</a:t>
             </a:r>
@@ -13083,7 +13103,7 @@
             <a:avLst/>
           </a:prstGeom>
           <a:solidFill>
-            <a:srgbClr val="FEE2E2"/>
+            <a:srgbClr val="F7E6EB"/>
           </a:solidFill>
           <a:ln>
             <a:noFill/>
@@ -13141,9 +13161,9 @@
             <a:r>
               <a:rPr sz="1200" b="1">
                 <a:solidFill>
-                  <a:srgbClr val="B91C1C"/>
-                </a:solidFill>
-                <a:latin typeface="Arial"/>
+                  <a:srgbClr val="BF0A30"/>
+                </a:solidFill>
+                <a:latin typeface="Aptos Display"/>
               </a:rPr>
               <a:t>Scores 3-5: Keep Stop / Do Not Override</a:t>
             </a:r>
@@ -13164,7 +13184,7 @@
     <p:bg>
       <p:bgPr>
         <a:solidFill>
-          <a:srgbClr val="F8FAFC"/>
+          <a:srgbClr val="FFFFFF"/>
         </a:solidFill>
         <a:effectLst/>
       </p:bgPr>
@@ -13206,9 +13226,9 @@
             <a:r>
               <a:rPr sz="2400" b="1">
                 <a:solidFill>
-                  <a:srgbClr val="0F172A"/>
-                </a:solidFill>
-                <a:latin typeface="Arial"/>
+                  <a:srgbClr val="05164D"/>
+                </a:solidFill>
+                <a:latin typeface="Aptos Display"/>
               </a:rPr>
               <a:t>Persistence, Dashboard, and Traceability</a:t>
             </a:r>
@@ -13223,17 +13243,19 @@
         </p:nvSpPr>
         <p:spPr>
           <a:xfrm>
-            <a:off x="10287000" y="279400"/>
-            <a:ext cx="1371600" cy="304800"/>
+            <a:off x="10134600" y="279400"/>
+            <a:ext cx="1524000" cy="304800"/>
           </a:xfrm>
           <a:prstGeom prst="roundRect">
             <a:avLst/>
           </a:prstGeom>
           <a:solidFill>
-            <a:srgbClr val="DBEAFE"/>
+            <a:srgbClr val="EEF3FF"/>
           </a:solidFill>
-          <a:ln>
-            <a:noFill/>
+          <a:ln w="10160">
+            <a:solidFill>
+              <a:srgbClr val="5999FF"/>
+            </a:solidFill>
           </a:ln>
         </p:spPr>
         <p:style>
@@ -13266,8 +13288,8 @@
         </p:nvSpPr>
         <p:spPr>
           <a:xfrm>
-            <a:off x="10287000" y="330200"/>
-            <a:ext cx="1371600" cy="228600"/>
+            <a:off x="10134600" y="330200"/>
+            <a:ext cx="1524000" cy="228600"/>
           </a:xfrm>
           <a:prstGeom prst="rect">
             <a:avLst/>
@@ -13288,9 +13310,9 @@
             <a:r>
               <a:rPr sz="950" b="1">
                 <a:solidFill>
-                  <a:srgbClr val="1E3A8A"/>
-                </a:solidFill>
-                <a:latin typeface="Arial"/>
+                  <a:srgbClr val="0C35F2"/>
+                </a:solidFill>
+                <a:latin typeface="Aptos Display"/>
               </a:rPr>
               <a:t>TRACEABILITY</a:t>
             </a:r>
@@ -13312,7 +13334,7 @@
             <a:avLst/>
           </a:prstGeom>
           <a:solidFill>
-            <a:srgbClr val="CBD5E1"/>
+            <a:srgbClr val="D9D9D2"/>
           </a:solidFill>
           <a:ln>
             <a:noFill/>
@@ -13370,9 +13392,9 @@
             <a:r>
               <a:rPr sz="850" b="0">
                 <a:solidFill>
-                  <a:srgbClr val="475569"/>
-                </a:solidFill>
-                <a:latin typeface="Arial"/>
+                  <a:srgbClr val="948E8D"/>
+                </a:solidFill>
+                <a:latin typeface="Aptos"/>
               </a:rPr>
               <a:t>AGV Fleet VLA Intelligence</a:t>
             </a:r>
@@ -13409,9 +13431,9 @@
             <a:r>
               <a:rPr sz="850" b="0">
                 <a:solidFill>
-                  <a:srgbClr val="475569"/>
-                </a:solidFill>
-                <a:latin typeface="Arial"/>
+                  <a:srgbClr val="948E8D"/>
+                </a:solidFill>
+                <a:latin typeface="Aptos"/>
               </a:rPr>
               <a:t>7/13</a:t>
             </a:r>
@@ -13437,7 +13459,7 @@
           </a:solidFill>
           <a:ln w="12700">
             <a:solidFill>
-              <a:srgbClr val="CBD5E1"/>
+              <a:srgbClr val="D9D9D2"/>
             </a:solidFill>
           </a:ln>
         </p:spPr>
@@ -13493,9 +13515,9 @@
             <a:r>
               <a:rPr sz="1220" b="0">
                 <a:solidFill>
-                  <a:srgbClr val="0F172A"/>
-                </a:solidFill>
-                <a:latin typeface="Arial"/>
+                  <a:srgbClr val="05164D"/>
+                </a:solidFill>
+                <a:latin typeface="Aptos"/>
               </a:rPr>
               <a:t>• Firestore stores incident context, model output, operator action, ratings, and notes.</a:t>
             </a:r>
@@ -13509,9 +13531,9 @@
             <a:r>
               <a:rPr sz="1220" b="0">
                 <a:solidFill>
-                  <a:srgbClr val="0F172A"/>
-                </a:solidFill>
-                <a:latin typeface="Arial"/>
+                  <a:srgbClr val="05164D"/>
+                </a:solidFill>
+                <a:latin typeface="Aptos"/>
               </a:rPr>
               <a:t>• Dashboard views aggregate total incidents, critical events, and low-score overrides.</a:t>
             </a:r>
@@ -13525,9 +13547,9 @@
             <a:r>
               <a:rPr sz="1220" b="0">
                 <a:solidFill>
-                  <a:srgbClr val="0F172A"/>
-                </a:solidFill>
-                <a:latin typeface="Arial"/>
+                  <a:srgbClr val="05164D"/>
+                </a:solidFill>
+                <a:latin typeface="Aptos"/>
               </a:rPr>
               <a:t>• Incident history supports CSV export and later audit of system recommendations versus operator actions.</a:t>
             </a:r>
@@ -13541,9 +13563,9 @@
             <a:r>
               <a:rPr sz="1220" b="0">
                 <a:solidFill>
-                  <a:srgbClr val="0F172A"/>
-                </a:solidFill>
-                <a:latin typeface="Arial"/>
+                  <a:srgbClr val="05164D"/>
+                </a:solidFill>
+                <a:latin typeface="Aptos"/>
               </a:rPr>
               <a:t>• History snapshots and source IDs are stored to make future consistency analysis traceable.</a:t>
             </a:r>
@@ -13569,7 +13591,7 @@
           </a:solidFill>
           <a:ln w="12700">
             <a:solidFill>
-              <a:srgbClr val="CBD5E1"/>
+              <a:srgbClr val="D9D9D2"/>
             </a:solidFill>
           </a:ln>
         </p:spPr>
@@ -13634,11 +13656,11 @@
             <a:avLst/>
           </a:prstGeom>
           <a:solidFill>
-            <a:srgbClr val="EFF6FF"/>
+            <a:srgbClr val="EEF3FF"/>
           </a:solidFill>
           <a:ln w="12700">
             <a:solidFill>
-              <a:srgbClr val="CBD5E1"/>
+              <a:srgbClr val="D9D9D2"/>
             </a:solidFill>
           </a:ln>
         </p:spPr>
@@ -13694,9 +13716,9 @@
             <a:r>
               <a:rPr sz="1300" b="1">
                 <a:solidFill>
-                  <a:srgbClr val="1E3A8A"/>
-                </a:solidFill>
-                <a:latin typeface="Arial"/>
+                  <a:srgbClr val="05164D"/>
+                </a:solidFill>
+                <a:latin typeface="Aptos Display"/>
               </a:rPr>
               <a:t>Traceability value</a:t>
             </a:r>
@@ -13733,9 +13755,9 @@
             <a:r>
               <a:rPr sz="1120" b="0">
                 <a:solidFill>
-                  <a:srgbClr val="0F172A"/>
-                </a:solidFill>
-                <a:latin typeface="Arial"/>
+                  <a:srgbClr val="05164D"/>
+                </a:solidFill>
+                <a:latin typeface="Aptos"/>
               </a:rPr>
               <a:t>Persisted history snapshots and source IDs make future score-drift analysis auditable instead of anecdotal.</a:t>
             </a:r>
@@ -13761,7 +13783,7 @@
           </a:solidFill>
           <a:ln w="12700">
             <a:solidFill>
-              <a:srgbClr val="CBD5E1"/>
+              <a:srgbClr val="D9D9D2"/>
             </a:solidFill>
           </a:ln>
         </p:spPr>
@@ -13825,7 +13847,7 @@
     <p:bg>
       <p:bgPr>
         <a:solidFill>
-          <a:srgbClr val="F8FAFC"/>
+          <a:srgbClr val="FFFFFF"/>
         </a:solidFill>
         <a:effectLst/>
       </p:bgPr>
@@ -13867,9 +13889,9 @@
             <a:r>
               <a:rPr sz="2400" b="1">
                 <a:solidFill>
-                  <a:srgbClr val="0F172A"/>
-                </a:solidFill>
-                <a:latin typeface="Arial"/>
+                  <a:srgbClr val="05164D"/>
+                </a:solidFill>
+                <a:latin typeface="Aptos Display"/>
               </a:rPr>
               <a:t>Evaluation Design</a:t>
             </a:r>
@@ -13884,17 +13906,19 @@
         </p:nvSpPr>
         <p:spPr>
           <a:xfrm>
-            <a:off x="10287000" y="279400"/>
-            <a:ext cx="1371600" cy="304800"/>
+            <a:off x="10134600" y="279400"/>
+            <a:ext cx="1524000" cy="304800"/>
           </a:xfrm>
           <a:prstGeom prst="roundRect">
             <a:avLst/>
           </a:prstGeom>
           <a:solidFill>
-            <a:srgbClr val="DBEAFE"/>
+            <a:srgbClr val="EEF3FF"/>
           </a:solidFill>
-          <a:ln>
-            <a:noFill/>
+          <a:ln w="10160">
+            <a:solidFill>
+              <a:srgbClr val="5999FF"/>
+            </a:solidFill>
           </a:ln>
         </p:spPr>
         <p:style>
@@ -13927,8 +13951,8 @@
         </p:nvSpPr>
         <p:spPr>
           <a:xfrm>
-            <a:off x="10287000" y="330200"/>
-            <a:ext cx="1371600" cy="228600"/>
+            <a:off x="10134600" y="330200"/>
+            <a:ext cx="1524000" cy="228600"/>
           </a:xfrm>
           <a:prstGeom prst="rect">
             <a:avLst/>
@@ -13949,9 +13973,9 @@
             <a:r>
               <a:rPr sz="950" b="1">
                 <a:solidFill>
-                  <a:srgbClr val="1E3A8A"/>
-                </a:solidFill>
-                <a:latin typeface="Arial"/>
+                  <a:srgbClr val="0C35F2"/>
+                </a:solidFill>
+                <a:latin typeface="Aptos Display"/>
               </a:rPr>
               <a:t>EVALUATION</a:t>
             </a:r>
@@ -13973,7 +13997,7 @@
             <a:avLst/>
           </a:prstGeom>
           <a:solidFill>
-            <a:srgbClr val="CBD5E1"/>
+            <a:srgbClr val="D9D9D2"/>
           </a:solidFill>
           <a:ln>
             <a:noFill/>
@@ -14031,9 +14055,9 @@
             <a:r>
               <a:rPr sz="850" b="0">
                 <a:solidFill>
-                  <a:srgbClr val="475569"/>
-                </a:solidFill>
-                <a:latin typeface="Arial"/>
+                  <a:srgbClr val="948E8D"/>
+                </a:solidFill>
+                <a:latin typeface="Aptos"/>
               </a:rPr>
               <a:t>AGV Fleet VLA Intelligence</a:t>
             </a:r>
@@ -14070,9 +14094,9 @@
             <a:r>
               <a:rPr sz="850" b="0">
                 <a:solidFill>
-                  <a:srgbClr val="475569"/>
-                </a:solidFill>
-                <a:latin typeface="Arial"/>
+                  <a:srgbClr val="948E8D"/>
+                </a:solidFill>
+                <a:latin typeface="Aptos"/>
               </a:rPr>
               <a:t>8/13</a:t>
             </a:r>
@@ -14098,7 +14122,7 @@
           </a:solidFill>
           <a:ln w="12700">
             <a:solidFill>
-              <a:srgbClr val="CBD5E1"/>
+              <a:srgbClr val="D9D9D2"/>
             </a:solidFill>
           </a:ln>
         </p:spPr>
@@ -14154,9 +14178,9 @@
             <a:r>
               <a:rPr sz="1500" b="1">
                 <a:solidFill>
-                  <a:srgbClr val="1E3A8A"/>
-                </a:solidFill>
-                <a:latin typeface="Arial"/>
+                  <a:srgbClr val="05164D"/>
+                </a:solidFill>
+                <a:latin typeface="Aptos Display"/>
               </a:rPr>
               <a:t>Pilot benchmark</a:t>
             </a:r>
@@ -14193,9 +14217,9 @@
             <a:r>
               <a:rPr sz="1220" b="0">
                 <a:solidFill>
-                  <a:srgbClr val="0F172A"/>
-                </a:solidFill>
-                <a:latin typeface="Arial"/>
+                  <a:srgbClr val="05164D"/>
+                </a:solidFill>
+                <a:latin typeface="Aptos"/>
               </a:rPr>
               <a:t>• 4 conservative text-surrogate scenarios</a:t>
             </a:r>
@@ -14209,9 +14233,9 @@
             <a:r>
               <a:rPr sz="1220" b="0">
                 <a:solidFill>
-                  <a:srgbClr val="0F172A"/>
-                </a:solidFill>
-                <a:latin typeface="Arial"/>
+                  <a:srgbClr val="05164D"/>
+                </a:solidFill>
+                <a:latin typeface="Aptos"/>
               </a:rPr>
               <a:t>• 1 clearly safe, 1 borderline, 2 clearly unsafe</a:t>
             </a:r>
@@ -14225,9 +14249,9 @@
             <a:r>
               <a:rPr sz="1220" b="0">
                 <a:solidFill>
-                  <a:srgbClr val="0F172A"/>
-                </a:solidFill>
-                <a:latin typeface="Arial"/>
+                  <a:srgbClr val="05164D"/>
+                </a:solidFill>
+                <a:latin typeface="Aptos"/>
               </a:rPr>
               <a:t>• 1 history-enabled case</a:t>
             </a:r>
@@ -14241,9 +14265,9 @@
             <a:r>
               <a:rPr sz="1220" b="0">
                 <a:solidFill>
-                  <a:srgbClr val="0F172A"/>
-                </a:solidFill>
-                <a:latin typeface="Arial"/>
+                  <a:srgbClr val="05164D"/>
+                </a:solidFill>
+                <a:latin typeface="Aptos"/>
               </a:rPr>
               <a:t>• 0 repeated scenario pairs</a:t>
             </a:r>
@@ -14269,7 +14293,7 @@
           </a:solidFill>
           <a:ln w="12700">
             <a:solidFill>
-              <a:srgbClr val="CBD5E1"/>
+              <a:srgbClr val="D9D9D2"/>
             </a:solidFill>
           </a:ln>
         </p:spPr>
@@ -14325,9 +14349,9 @@
             <a:r>
               <a:rPr sz="1500" b="1">
                 <a:solidFill>
-                  <a:srgbClr val="1E3A8A"/>
-                </a:solidFill>
-                <a:latin typeface="Arial"/>
+                  <a:srgbClr val="05164D"/>
+                </a:solidFill>
+                <a:latin typeface="Aptos Display"/>
               </a:rPr>
               <a:t>Operational audit</a:t>
             </a:r>
@@ -14364,9 +14388,9 @@
             <a:r>
               <a:rPr sz="1220" b="0">
                 <a:solidFill>
-                  <a:srgbClr val="0F172A"/>
-                </a:solidFill>
-                <a:latin typeface="Arial"/>
+                  <a:srgbClr val="05164D"/>
+                </a:solidFill>
+                <a:latin typeface="Aptos"/>
               </a:rPr>
               <a:t>• 20 exported dashboard incidents</a:t>
             </a:r>
@@ -14380,9 +14404,9 @@
             <a:r>
               <a:rPr sz="1220" b="0">
                 <a:solidFill>
-                  <a:srgbClr val="0F172A"/>
-                </a:solidFill>
-                <a:latin typeface="Arial"/>
+                  <a:srgbClr val="05164D"/>
+                </a:solidFill>
+                <a:latin typeface="Aptos"/>
               </a:rPr>
               <a:t>• 3 repeated object groups and 9 repeated rows</a:t>
             </a:r>
@@ -14396,9 +14420,9 @@
             <a:r>
               <a:rPr sz="1220" b="0">
                 <a:solidFill>
-                  <a:srgbClr val="0F172A"/>
-                </a:solidFill>
-                <a:latin typeface="Arial"/>
+                  <a:srgbClr val="05164D"/>
+                </a:solidFill>
+                <a:latin typeface="Aptos"/>
               </a:rPr>
               <a:t>• 1 repeated group with score variance</a:t>
             </a:r>
@@ -14412,9 +14436,9 @@
             <a:r>
               <a:rPr sz="1220" b="0">
                 <a:solidFill>
-                  <a:srgbClr val="0F172A"/>
-                </a:solidFill>
-                <a:latin typeface="Arial"/>
+                  <a:srgbClr val="05164D"/>
+                </a:solidFill>
+                <a:latin typeface="Aptos"/>
               </a:rPr>
               <a:t>• 2 telemetry anomaly rows</a:t>
             </a:r>
@@ -14436,11 +14460,11 @@
             <a:avLst/>
           </a:prstGeom>
           <a:solidFill>
-            <a:srgbClr val="EFF6FF"/>
+            <a:srgbClr val="EEF3FF"/>
           </a:solidFill>
           <a:ln w="12700">
             <a:solidFill>
-              <a:srgbClr val="CBD5E1"/>
+              <a:srgbClr val="D9D9D2"/>
             </a:solidFill>
           </a:ln>
         </p:spPr>
@@ -14496,9 +14520,9 @@
             <a:r>
               <a:rPr sz="1130" b="1">
                 <a:solidFill>
-                  <a:srgbClr val="0F172A"/>
-                </a:solidFill>
-                <a:latin typeface="Arial"/>
+                  <a:srgbClr val="05164D"/>
+                </a:solidFill>
+                <a:latin typeface="Aptos Display"/>
               </a:rPr>
               <a:t>Binary decision boundary review</a:t>
             </a:r>
@@ -14520,11 +14544,11 @@
             <a:avLst/>
           </a:prstGeom>
           <a:solidFill>
-            <a:srgbClr val="EFF6FF"/>
+            <a:srgbClr val="EEF3FF"/>
           </a:solidFill>
           <a:ln w="12700">
             <a:solidFill>
-              <a:srgbClr val="CBD5E1"/>
+              <a:srgbClr val="D9D9D2"/>
             </a:solidFill>
           </a:ln>
         </p:spPr>
@@ -14580,9 +14604,9 @@
             <a:r>
               <a:rPr sz="1130" b="1">
                 <a:solidFill>
-                  <a:srgbClr val="0F172A"/>
-                </a:solidFill>
-                <a:latin typeface="Arial"/>
+                  <a:srgbClr val="05164D"/>
+                </a:solidFill>
+                <a:latin typeface="Aptos Display"/>
               </a:rPr>
               <a:t>Danger-score drift on repeated cases</a:t>
             </a:r>
@@ -14604,11 +14628,11 @@
             <a:avLst/>
           </a:prstGeom>
           <a:solidFill>
-            <a:srgbClr val="EFF6FF"/>
+            <a:srgbClr val="EEF3FF"/>
           </a:solidFill>
           <a:ln w="12700">
             <a:solidFill>
-              <a:srgbClr val="CBD5E1"/>
+              <a:srgbClr val="D9D9D2"/>
             </a:solidFill>
           </a:ln>
         </p:spPr>
@@ -14664,9 +14688,9 @@
             <a:r>
               <a:rPr sz="1130" b="1">
                 <a:solidFill>
-                  <a:srgbClr val="0F172A"/>
-                </a:solidFill>
-                <a:latin typeface="Arial"/>
+                  <a:srgbClr val="05164D"/>
+                </a:solidFill>
+                <a:latin typeface="Aptos Display"/>
               </a:rPr>
               <a:t>Operator-action traceability</a:t>
             </a:r>
@@ -14688,11 +14712,11 @@
             <a:avLst/>
           </a:prstGeom>
           <a:solidFill>
-            <a:srgbClr val="EFF6FF"/>
+            <a:srgbClr val="EEF3FF"/>
           </a:solidFill>
           <a:ln w="12700">
             <a:solidFill>
-              <a:srgbClr val="CBD5E1"/>
+              <a:srgbClr val="D9D9D2"/>
             </a:solidFill>
           </a:ln>
         </p:spPr>
@@ -14748,9 +14772,9 @@
             <a:r>
               <a:rPr sz="1130" b="1">
                 <a:solidFill>
-                  <a:srgbClr val="0F172A"/>
-                </a:solidFill>
-                <a:latin typeface="Arial"/>
+                  <a:srgbClr val="05164D"/>
+                </a:solidFill>
+                <a:latin typeface="Aptos Display"/>
               </a:rPr>
               <a:t>Data-quality anomaly detection</a:t>
             </a:r>
@@ -14776,7 +14800,7 @@
           </a:solidFill>
           <a:ln w="12700">
             <a:solidFill>
-              <a:srgbClr val="CBD5E1"/>
+              <a:srgbClr val="D9D9D2"/>
             </a:solidFill>
           </a:ln>
         </p:spPr>
@@ -14832,9 +14856,9 @@
             <a:r>
               <a:rPr sz="1200" b="1">
                 <a:solidFill>
-                  <a:srgbClr val="B45309"/>
-                </a:solidFill>
-                <a:latin typeface="Arial"/>
+                  <a:srgbClr val="706254"/>
+                </a:solidFill>
+                <a:latin typeface="Aptos Display"/>
               </a:rPr>
               <a:t>The current evidence is prototype-level and descriptive. It is not an industrial validation benchmark.</a:t>
             </a:r>
@@ -14855,7 +14879,7 @@
     <p:bg>
       <p:bgPr>
         <a:solidFill>
-          <a:srgbClr val="F8FAFC"/>
+          <a:srgbClr val="FFFFFF"/>
         </a:solidFill>
         <a:effectLst/>
       </p:bgPr>
@@ -14897,9 +14921,9 @@
             <a:r>
               <a:rPr sz="2400" b="1">
                 <a:solidFill>
-                  <a:srgbClr val="0F172A"/>
-                </a:solidFill>
-                <a:latin typeface="Arial"/>
+                  <a:srgbClr val="05164D"/>
+                </a:solidFill>
+                <a:latin typeface="Aptos Display"/>
               </a:rPr>
               <a:t>Operational Audit Results</a:t>
             </a:r>
@@ -14914,17 +14938,19 @@
         </p:nvSpPr>
         <p:spPr>
           <a:xfrm>
-            <a:off x="10287000" y="279400"/>
-            <a:ext cx="1371600" cy="304800"/>
+            <a:off x="10134600" y="279400"/>
+            <a:ext cx="1524000" cy="304800"/>
           </a:xfrm>
           <a:prstGeom prst="roundRect">
             <a:avLst/>
           </a:prstGeom>
           <a:solidFill>
-            <a:srgbClr val="DBEAFE"/>
+            <a:srgbClr val="EEF3FF"/>
           </a:solidFill>
-          <a:ln>
-            <a:noFill/>
+          <a:ln w="10160">
+            <a:solidFill>
+              <a:srgbClr val="5999FF"/>
+            </a:solidFill>
           </a:ln>
         </p:spPr>
         <p:style>
@@ -14957,8 +14983,8 @@
         </p:nvSpPr>
         <p:spPr>
           <a:xfrm>
-            <a:off x="10287000" y="330200"/>
-            <a:ext cx="1371600" cy="228600"/>
+            <a:off x="10134600" y="330200"/>
+            <a:ext cx="1524000" cy="228600"/>
           </a:xfrm>
           <a:prstGeom prst="rect">
             <a:avLst/>
@@ -14979,9 +15005,9 @@
             <a:r>
               <a:rPr sz="950" b="1">
                 <a:solidFill>
-                  <a:srgbClr val="1E3A8A"/>
-                </a:solidFill>
-                <a:latin typeface="Arial"/>
+                  <a:srgbClr val="0C35F2"/>
+                </a:solidFill>
+                <a:latin typeface="Aptos Display"/>
               </a:rPr>
               <a:t>RESULTS</a:t>
             </a:r>
@@ -15003,7 +15029,7 @@
             <a:avLst/>
           </a:prstGeom>
           <a:solidFill>
-            <a:srgbClr val="CBD5E1"/>
+            <a:srgbClr val="D9D9D2"/>
           </a:solidFill>
           <a:ln>
             <a:noFill/>
@@ -15061,9 +15087,9 @@
             <a:r>
               <a:rPr sz="850" b="0">
                 <a:solidFill>
-                  <a:srgbClr val="475569"/>
-                </a:solidFill>
-                <a:latin typeface="Arial"/>
+                  <a:srgbClr val="948E8D"/>
+                </a:solidFill>
+                <a:latin typeface="Aptos"/>
               </a:rPr>
               <a:t>AGV Fleet VLA Intelligence</a:t>
             </a:r>
@@ -15100,9 +15126,9 @@
             <a:r>
               <a:rPr sz="850" b="0">
                 <a:solidFill>
-                  <a:srgbClr val="475569"/>
-                </a:solidFill>
-                <a:latin typeface="Arial"/>
+                  <a:srgbClr val="948E8D"/>
+                </a:solidFill>
+                <a:latin typeface="Aptos"/>
               </a:rPr>
               <a:t>9/13</a:t>
             </a:r>
@@ -15128,7 +15154,7 @@
           </a:solidFill>
           <a:ln w="12700">
             <a:solidFill>
-              <a:srgbClr val="CBD5E1"/>
+              <a:srgbClr val="D9D9D2"/>
             </a:solidFill>
           </a:ln>
         </p:spPr>
@@ -15169,7 +15195,7 @@
             <a:avLst/>
           </a:prstGeom>
           <a:solidFill>
-            <a:srgbClr val="1D4ED8"/>
+            <a:srgbClr val="0C35F2"/>
           </a:solidFill>
           <a:ln>
             <a:noFill/>
@@ -15227,9 +15253,9 @@
             <a:r>
               <a:rPr sz="1100" b="1">
                 <a:solidFill>
-                  <a:srgbClr val="475569"/>
-                </a:solidFill>
-                <a:latin typeface="Arial"/>
+                  <a:srgbClr val="948E8D"/>
+                </a:solidFill>
+                <a:latin typeface="Aptos Display"/>
               </a:rPr>
               <a:t>Exported incidents</a:t>
             </a:r>
@@ -15266,9 +15292,9 @@
             <a:r>
               <a:rPr sz="2500" b="1">
                 <a:solidFill>
-                  <a:srgbClr val="1D4ED8"/>
-                </a:solidFill>
-                <a:latin typeface="Arial"/>
+                  <a:srgbClr val="0C35F2"/>
+                </a:solidFill>
+                <a:latin typeface="Aptos Display"/>
               </a:rPr>
               <a:t>20</a:t>
             </a:r>
@@ -15294,7 +15320,7 @@
           </a:solidFill>
           <a:ln w="12700">
             <a:solidFill>
-              <a:srgbClr val="CBD5E1"/>
+              <a:srgbClr val="D9D9D2"/>
             </a:solidFill>
           </a:ln>
         </p:spPr>
@@ -15335,7 +15361,7 @@
             <a:avLst/>
           </a:prstGeom>
           <a:solidFill>
-            <a:srgbClr val="1E3A8A"/>
+            <a:srgbClr val="05164D"/>
           </a:solidFill>
           <a:ln>
             <a:noFill/>
@@ -15393,9 +15419,9 @@
             <a:r>
               <a:rPr sz="1100" b="1">
                 <a:solidFill>
-                  <a:srgbClr val="475569"/>
-                </a:solidFill>
-                <a:latin typeface="Arial"/>
+                  <a:srgbClr val="948E8D"/>
+                </a:solidFill>
+                <a:latin typeface="Aptos Display"/>
               </a:rPr>
               <a:t>Repeated groups</a:t>
             </a:r>
@@ -15432,9 +15458,9 @@
             <a:r>
               <a:rPr sz="2500" b="1">
                 <a:solidFill>
-                  <a:srgbClr val="1E3A8A"/>
-                </a:solidFill>
-                <a:latin typeface="Arial"/>
+                  <a:srgbClr val="05164D"/>
+                </a:solidFill>
+                <a:latin typeface="Aptos Display"/>
               </a:rPr>
               <a:t>3</a:t>
             </a:r>
@@ -15460,7 +15486,7 @@
           </a:solidFill>
           <a:ln w="12700">
             <a:solidFill>
-              <a:srgbClr val="CBD5E1"/>
+              <a:srgbClr val="D9D9D2"/>
             </a:solidFill>
           </a:ln>
         </p:spPr>
@@ -15501,7 +15527,7 @@
             <a:avLst/>
           </a:prstGeom>
           <a:solidFill>
-            <a:srgbClr val="B45309"/>
+            <a:srgbClr val="706254"/>
           </a:solidFill>
           <a:ln>
             <a:noFill/>
@@ -15559,9 +15585,9 @@
             <a:r>
               <a:rPr sz="1100" b="1">
                 <a:solidFill>
-                  <a:srgbClr val="475569"/>
-                </a:solidFill>
-                <a:latin typeface="Arial"/>
+                  <a:srgbClr val="948E8D"/>
+                </a:solidFill>
+                <a:latin typeface="Aptos Display"/>
               </a:rPr>
               <a:t>Repeated rows</a:t>
             </a:r>
@@ -15598,9 +15624,9 @@
             <a:r>
               <a:rPr sz="2500" b="1">
                 <a:solidFill>
-                  <a:srgbClr val="B45309"/>
-                </a:solidFill>
-                <a:latin typeface="Arial"/>
+                  <a:srgbClr val="706254"/>
+                </a:solidFill>
+                <a:latin typeface="Aptos Display"/>
               </a:rPr>
               <a:t>9</a:t>
             </a:r>
@@ -15626,7 +15652,7 @@
           </a:solidFill>
           <a:ln w="12700">
             <a:solidFill>
-              <a:srgbClr val="CBD5E1"/>
+              <a:srgbClr val="D9D9D2"/>
             </a:solidFill>
           </a:ln>
         </p:spPr>
@@ -15667,7 +15693,7 @@
             <a:avLst/>
           </a:prstGeom>
           <a:solidFill>
-            <a:srgbClr val="B91C1C"/>
+            <a:srgbClr val="BF0A30"/>
           </a:solidFill>
           <a:ln>
             <a:noFill/>
@@ -15725,9 +15751,9 @@
             <a:r>
               <a:rPr sz="1100" b="1">
                 <a:solidFill>
-                  <a:srgbClr val="475569"/>
-                </a:solidFill>
-                <a:latin typeface="Arial"/>
+                  <a:srgbClr val="948E8D"/>
+                </a:solidFill>
+                <a:latin typeface="Aptos Display"/>
               </a:rPr>
               <a:t>Variance groups</a:t>
             </a:r>
@@ -15764,9 +15790,9 @@
             <a:r>
               <a:rPr sz="2500" b="1">
                 <a:solidFill>
-                  <a:srgbClr val="B91C1C"/>
-                </a:solidFill>
-                <a:latin typeface="Arial"/>
+                  <a:srgbClr val="BF0A30"/>
+                </a:solidFill>
+                <a:latin typeface="Aptos Display"/>
               </a:rPr>
               <a:t>1</a:t>
             </a:r>
@@ -15792,7 +15818,7 @@
           </a:solidFill>
           <a:ln w="12700">
             <a:solidFill>
-              <a:srgbClr val="CBD5E1"/>
+              <a:srgbClr val="D9D9D2"/>
             </a:solidFill>
           </a:ln>
         </p:spPr>
@@ -15833,7 +15859,7 @@
             <a:avLst/>
           </a:prstGeom>
           <a:solidFill>
-            <a:srgbClr val="15803D"/>
+            <a:srgbClr val="388C73"/>
           </a:solidFill>
           <a:ln>
             <a:noFill/>
@@ -15891,9 +15917,9 @@
             <a:r>
               <a:rPr sz="1100" b="1">
                 <a:solidFill>
-                  <a:srgbClr val="475569"/>
-                </a:solidFill>
-                <a:latin typeface="Arial"/>
+                  <a:srgbClr val="948E8D"/>
+                </a:solidFill>
+                <a:latin typeface="Aptos Display"/>
               </a:rPr>
               <a:t>Telemetry anomalies</a:t>
             </a:r>
@@ -15930,9 +15956,9 @@
             <a:r>
               <a:rPr sz="2500" b="1">
                 <a:solidFill>
-                  <a:srgbClr val="15803D"/>
-                </a:solidFill>
-                <a:latin typeface="Arial"/>
+                  <a:srgbClr val="388C73"/>
+                </a:solidFill>
+                <a:latin typeface="Aptos Display"/>
               </a:rPr>
               <a:t>2</a:t>
             </a:r>
@@ -15958,7 +15984,7 @@
           </a:solidFill>
           <a:ln w="12700">
             <a:solidFill>
-              <a:srgbClr val="CBD5E1"/>
+              <a:srgbClr val="D9D9D2"/>
             </a:solidFill>
           </a:ln>
         </p:spPr>
@@ -16014,9 +16040,9 @@
             <a:r>
               <a:rPr sz="1350" b="1">
                 <a:solidFill>
-                  <a:srgbClr val="1E3A8A"/>
-                </a:solidFill>
-                <a:latin typeface="Arial"/>
+                  <a:srgbClr val="05164D"/>
+                </a:solidFill>
+                <a:latin typeface="Aptos Display"/>
               </a:rPr>
               <a:t>Interpretation</a:t>
             </a:r>
@@ -16053,9 +16079,9 @@
             <a:r>
               <a:rPr sz="1240" b="0">
                 <a:solidFill>
-                  <a:srgbClr val="0F172A"/>
-                </a:solidFill>
-                <a:latin typeface="Arial"/>
+                  <a:srgbClr val="05164D"/>
+                </a:solidFill>
+                <a:latin typeface="Aptos"/>
               </a:rPr>
               <a:t>• The repeated-case evidence is small but useful for descriptive consistency checks.</a:t>
             </a:r>
@@ -16069,9 +16095,9 @@
             <a:r>
               <a:rPr sz="1240" b="0">
                 <a:solidFill>
-                  <a:srgbClr val="0F172A"/>
-                </a:solidFill>
-                <a:latin typeface="Arial"/>
+                  <a:srgbClr val="05164D"/>
+                </a:solidFill>
+                <a:latin typeface="Aptos"/>
               </a:rPr>
               <a:t>• Only one repeated object cluster showed score variance in the export.</a:t>
             </a:r>
@@ -16085,9 +16111,9 @@
             <a:r>
               <a:rPr sz="1240" b="0">
                 <a:solidFill>
-                  <a:srgbClr val="0F172A"/>
-                </a:solidFill>
-                <a:latin typeface="Arial"/>
+                  <a:srgbClr val="05164D"/>
+                </a:solidFill>
+                <a:latin typeface="Aptos"/>
               </a:rPr>
               <a:t>• Two repeated object groups remained stable at score 4 across all three occurrences.</a:t>
             </a:r>
@@ -16109,11 +16135,11 @@
             <a:avLst/>
           </a:prstGeom>
           <a:solidFill>
-            <a:srgbClr val="EFF6FF"/>
+            <a:srgbClr val="EEF3FF"/>
           </a:solidFill>
           <a:ln w="12700">
             <a:solidFill>
-              <a:srgbClr val="CBD5E1"/>
+              <a:srgbClr val="D9D9D2"/>
             </a:solidFill>
           </a:ln>
         </p:spPr>
@@ -16169,9 +16195,9 @@
             <a:r>
               <a:rPr sz="1080" b="0">
                 <a:solidFill>
-                  <a:srgbClr val="475569"/>
-                </a:solidFill>
-                <a:latin typeface="Arial"/>
+                  <a:srgbClr val="595452"/>
+                </a:solidFill>
+                <a:latin typeface="Aptos"/>
               </a:rPr>
               <a:t>Source: incident_history_audit.json generated from the exported dashboard CSV.</a:t>
             </a:r>
